--- a/yocto_training_all_session_decks/session_decks/D2S3_Recipes_Part2.pptx
+++ b/yocto_training_all_session_decks/session_decks/D2S3_Recipes_Part2.pptx
@@ -5,25 +5,25 @@
     <p:sldMasterId id="2147483648" r:id="rId1"/>
   </p:sldMasterIdLst>
   <p:notesMasterIdLst>
-    <p:notesMasterId r:id="rId8"/>
+    <p:notesMasterId r:id="rId10"/>
   </p:notesMasterIdLst>
   <p:handoutMasterIdLst>
-    <p:handoutMasterId r:id="rId9"/>
+    <p:handoutMasterId r:id="rId11"/>
   </p:handoutMasterIdLst>
   <p:sldIdLst>
-    <p:sldId id="1007" r:id="rId18"/>
-    <p:sldId id="1008" r:id="rId19"/>
-    <p:sldId id="1009" r:id="rId20"/>
-    <p:sldId id="1010" r:id="rId21"/>
-    <p:sldId id="1011" r:id="rId22"/>
-    <p:sldId id="1012" r:id="rId23"/>
-    <p:sldId id="1013" r:id="rId24"/>
-    <p:sldId id="1014" r:id="rId25"/>
+    <p:sldId id="1007" r:id="rId2"/>
+    <p:sldId id="1008" r:id="rId3"/>
+    <p:sldId id="1009" r:id="rId4"/>
+    <p:sldId id="1010" r:id="rId5"/>
+    <p:sldId id="1011" r:id="rId6"/>
+    <p:sldId id="1012" r:id="rId7"/>
+    <p:sldId id="1013" r:id="rId8"/>
+    <p:sldId id="1014" r:id="rId9"/>
   </p:sldIdLst>
   <p:sldSz cx="12192000" cy="6858000"/>
   <p:notesSz cx="6858000" cy="9144000"/>
   <p:custDataLst>
-    <p:tags r:id="rId10"/>
+    <p:tags r:id="rId12"/>
   </p:custDataLst>
   <p:defaultTextStyle>
     <a:defPPr>
@@ -2929,7 +2929,7 @@
           <a:p>
             <a:fld id="{0CEC647C-F50C-4F78-AA33-D7AA6CDA18EE}" type="datetimeFigureOut">
               <a:rPr lang="en-US" smtClean="0"/>
-              <a:t>7/13/2025</a:t>
+              <a:t>6/10/2026</a:t>
             </a:fld>
             <a:endParaRPr lang="en-US"/>
           </a:p>
@@ -3094,7 +3094,7 @@
           <a:p>
             <a:fld id="{3A83341F-E62C-483B-84B4-966F8BE46097}" type="datetimeFigureOut">
               <a:rPr lang="en-US" smtClean="0"/>
-              <a:t>7/13/2025</a:t>
+              <a:t>6/10/2026</a:t>
             </a:fld>
             <a:endParaRPr lang="en-US"/>
           </a:p>
@@ -5178,8 +5178,8 @@
 </p:sldMaster>
 </file>
 
-<file path=ppt/slides/slide10.xml><?xml version="1.0" encoding="utf-8"?>
-<p:sld xmlns:a="http://schemas.openxmlformats.org/drawingml/2006/main" xmlns:p="http://schemas.openxmlformats.org/presentationml/2006/main" xmlns:r="http://schemas.openxmlformats.org/officeDocument/2006/relationships">
+<file path=ppt/slides/slide1.xml><?xml version="1.0" encoding="utf-8"?>
+<p:sld xmlns:a="http://schemas.openxmlformats.org/drawingml/2006/main" xmlns:r="http://schemas.openxmlformats.org/officeDocument/2006/relationships" xmlns:p="http://schemas.openxmlformats.org/presentationml/2006/main">
   <p:cSld>
     <p:spTree>
       <p:nvGrpSpPr>
@@ -5187,7 +5187,120 @@
         <p:cNvGrpSpPr/>
         <p:nvPr/>
       </p:nvGrpSpPr>
-      <p:grpSpPr/>
+      <p:grpSpPr>
+        <a:xfrm>
+          <a:off x="0" y="0"/>
+          <a:ext cx="0" cy="0"/>
+          <a:chOff x="0" y="0"/>
+          <a:chExt cx="0" cy="0"/>
+        </a:xfrm>
+      </p:grpSpPr>
+      <p:sp>
+        <p:nvSpPr>
+          <p:cNvPr id="2" name="Title 1"/>
+          <p:cNvSpPr>
+            <a:spLocks noGrp="1"/>
+          </p:cNvSpPr>
+          <p:nvPr>
+            <p:ph type="ctrTitle"/>
+          </p:nvPr>
+        </p:nvSpPr>
+        <p:spPr/>
+        <p:txBody>
+          <a:bodyPr/>
+          <a:lstStyle/>
+          <a:p>
+            <a:r>
+              <a:rPr sz="4400" b="1" dirty="0">
+                <a:solidFill>
+                  <a:srgbClr val="FFFFFF"/>
+                </a:solidFill>
+                <a:latin typeface="Calibri"/>
+              </a:rPr>
+              <a:t>Recipes</a:t>
+            </a:r>
+            <a:r>
+              <a:rPr lang="en-IN" sz="4400" b="1">
+                <a:solidFill>
+                  <a:srgbClr val="FFFFFF"/>
+                </a:solidFill>
+                <a:latin typeface="Calibri"/>
+              </a:rPr>
+              <a:t>: </a:t>
+            </a:r>
+            <a:r>
+              <a:rPr sz="4400" b="1">
+                <a:solidFill>
+                  <a:srgbClr val="FFFFFF"/>
+                </a:solidFill>
+                <a:latin typeface="Calibri"/>
+              </a:rPr>
+              <a:t>Part </a:t>
+            </a:r>
+            <a:r>
+              <a:rPr sz="4400" b="1" dirty="0">
+                <a:solidFill>
+                  <a:srgbClr val="FFFFFF"/>
+                </a:solidFill>
+                <a:latin typeface="Calibri"/>
+              </a:rPr>
+              <a:t>2</a:t>
+            </a:r>
+          </a:p>
+        </p:txBody>
+      </p:sp>
+      <p:sp>
+        <p:nvSpPr>
+          <p:cNvPr id="3" name="Subtitle 2"/>
+          <p:cNvSpPr>
+            <a:spLocks noGrp="1"/>
+          </p:cNvSpPr>
+          <p:nvPr>
+            <p:ph type="subTitle" idx="1"/>
+          </p:nvPr>
+        </p:nvSpPr>
+        <p:spPr/>
+        <p:txBody>
+          <a:bodyPr/>
+          <a:lstStyle/>
+          <a:p>
+            <a:r>
+              <a:rPr sz="1800" dirty="0">
+                <a:solidFill>
+                  <a:srgbClr val="FFFFFF"/>
+                </a:solidFill>
+                <a:latin typeface="Calibri"/>
+              </a:rPr>
+              <a:t>Packaging and image composition</a:t>
+            </a:r>
+          </a:p>
+        </p:txBody>
+      </p:sp>
+    </p:spTree>
+  </p:cSld>
+  <p:clrMapOvr>
+    <a:masterClrMapping/>
+  </p:clrMapOvr>
+</p:sld>
+</file>
+
+<file path=ppt/slides/slide2.xml><?xml version="1.0" encoding="utf-8"?>
+<p:sld xmlns:a="http://schemas.openxmlformats.org/drawingml/2006/main" xmlns:r="http://schemas.openxmlformats.org/officeDocument/2006/relationships" xmlns:p="http://schemas.openxmlformats.org/presentationml/2006/main">
+  <p:cSld>
+    <p:spTree>
+      <p:nvGrpSpPr>
+        <p:cNvPr id="1" name=""/>
+        <p:cNvGrpSpPr/>
+        <p:nvPr/>
+      </p:nvGrpSpPr>
+      <p:grpSpPr>
+        <a:xfrm>
+          <a:off x="0" y="0"/>
+          <a:ext cx="0" cy="0"/>
+          <a:chOff x="0" y="0"/>
+          <a:chExt cx="0" cy="0"/>
+        </a:xfrm>
+      </p:grpSpPr>
       <p:sp>
         <p:nvSpPr>
           <p:cNvPr id="2" name="Title 1"/>
@@ -5204,13 +5317,178 @@
           <a:lstStyle/>
           <a:p>
             <a:r>
-              <a:rPr sz="3200" b="1">
-                <a:solidFill>
-                  <a:srgbClr val="CC0066"/>
-                </a:solidFill>
-                <a:latin typeface="Calibri"/>
-              </a:rPr>
-              <a:t>Selection Criteria</a:t>
+              <a:rPr sz="3200" b="1" dirty="0">
+                <a:latin typeface="Calibri"/>
+              </a:rPr>
+              <a:t>Session Agenda</a:t>
+            </a:r>
+          </a:p>
+        </p:txBody>
+      </p:sp>
+      <p:sp>
+        <p:nvSpPr>
+          <p:cNvPr id="3" name="TextBox 2"/>
+          <p:cNvSpPr txBox="1"/>
+          <p:nvPr/>
+        </p:nvSpPr>
+        <p:spPr>
+          <a:xfrm>
+            <a:off x="822960" y="1463040"/>
+            <a:ext cx="10515600" cy="5029200"/>
+          </a:xfrm>
+          <a:prstGeom prst="rect">
+            <a:avLst/>
+          </a:prstGeom>
+          <a:noFill/>
+        </p:spPr>
+        <p:txBody>
+          <a:bodyPr wrap="square" lIns="45720" rIns="45720">
+            <a:spAutoFit/>
+          </a:bodyPr>
+          <a:lstStyle/>
+          <a:p>
+            <a:pPr>
+              <a:spcAft>
+                <a:spcPts val="600"/>
+              </a:spcAft>
+            </a:pPr>
+            <a:r>
+              <a:rPr sz="2000" b="0" i="0">
+                <a:solidFill>
+                  <a:srgbClr val="333333"/>
+                </a:solidFill>
+                <a:latin typeface="Calibri"/>
+              </a:rPr>
+              <a:t>1.  Packaging models — rpm, deb, ipk</a:t>
+            </a:r>
+          </a:p>
+          <a:p>
+            <a:pPr>
+              <a:spcAft>
+                <a:spcPts val="600"/>
+              </a:spcAft>
+            </a:pPr>
+            <a:r>
+              <a:rPr sz="2000" b="0" i="0">
+                <a:solidFill>
+                  <a:srgbClr val="333333"/>
+                </a:solidFill>
+                <a:latin typeface="Calibri"/>
+              </a:rPr>
+              <a:t>2.  Selection criteria for embedded products</a:t>
+            </a:r>
+          </a:p>
+          <a:p>
+            <a:pPr>
+              <a:spcAft>
+                <a:spcPts val="600"/>
+              </a:spcAft>
+            </a:pPr>
+            <a:r>
+              <a:rPr sz="2000" b="0" i="0">
+                <a:solidFill>
+                  <a:srgbClr val="333333"/>
+                </a:solidFill>
+                <a:latin typeface="Calibri"/>
+              </a:rPr>
+              <a:t>3.  IMAGE_FEATURES — what they actually do</a:t>
+            </a:r>
+          </a:p>
+          <a:p>
+            <a:pPr>
+              <a:spcAft>
+                <a:spcPts val="600"/>
+              </a:spcAft>
+            </a:pPr>
+            <a:r>
+              <a:rPr sz="2000" b="0" i="0">
+                <a:solidFill>
+                  <a:srgbClr val="333333"/>
+                </a:solidFill>
+                <a:latin typeface="Calibri"/>
+              </a:rPr>
+              <a:t>4.  Packagegroups — bundling related software</a:t>
+            </a:r>
+          </a:p>
+          <a:p>
+            <a:pPr>
+              <a:spcAft>
+                <a:spcPts val="600"/>
+              </a:spcAft>
+            </a:pPr>
+            <a:r>
+              <a:rPr sz="2000" b="0" i="0">
+                <a:solidFill>
+                  <a:srgbClr val="333333"/>
+                </a:solidFill>
+                <a:latin typeface="Calibri"/>
+              </a:rPr>
+              <a:t>5.  IMAGE_INSTALL patterns</a:t>
+            </a:r>
+          </a:p>
+          <a:p>
+            <a:pPr>
+              <a:spcAft>
+                <a:spcPts val="600"/>
+              </a:spcAft>
+            </a:pPr>
+            <a:r>
+              <a:rPr sz="2000" b="0" i="0">
+                <a:solidFill>
+                  <a:srgbClr val="333333"/>
+                </a:solidFill>
+                <a:latin typeface="Calibri"/>
+              </a:rPr>
+              <a:t>6.  Distro features vs machine features vs image features</a:t>
+            </a:r>
+          </a:p>
+        </p:txBody>
+      </p:sp>
+    </p:spTree>
+  </p:cSld>
+  <p:clrMapOvr>
+    <a:masterClrMapping/>
+  </p:clrMapOvr>
+</p:sld>
+</file>
+
+<file path=ppt/slides/slide3.xml><?xml version="1.0" encoding="utf-8"?>
+<p:sld xmlns:a="http://schemas.openxmlformats.org/drawingml/2006/main" xmlns:r="http://schemas.openxmlformats.org/officeDocument/2006/relationships" xmlns:p="http://schemas.openxmlformats.org/presentationml/2006/main">
+  <p:cSld>
+    <p:spTree>
+      <p:nvGrpSpPr>
+        <p:cNvPr id="1" name=""/>
+        <p:cNvGrpSpPr/>
+        <p:nvPr/>
+      </p:nvGrpSpPr>
+      <p:grpSpPr>
+        <a:xfrm>
+          <a:off x="0" y="0"/>
+          <a:ext cx="0" cy="0"/>
+          <a:chOff x="0" y="0"/>
+          <a:chExt cx="0" cy="0"/>
+        </a:xfrm>
+      </p:grpSpPr>
+      <p:sp>
+        <p:nvSpPr>
+          <p:cNvPr id="2" name="Title 1"/>
+          <p:cNvSpPr>
+            <a:spLocks noGrp="1"/>
+          </p:cNvSpPr>
+          <p:nvPr>
+            <p:ph type="title"/>
+          </p:nvPr>
+        </p:nvSpPr>
+        <p:spPr/>
+        <p:txBody>
+          <a:bodyPr/>
+          <a:lstStyle/>
+          <a:p>
+            <a:r>
+              <a:rPr sz="3200" b="1" dirty="0">
+                <a:latin typeface="Calibri"/>
+              </a:rPr>
+              <a:t>Three Packaging Models</a:t>
             </a:r>
           </a:p>
         </p:txBody>
@@ -5232,7 +5510,7 @@
           <a:noFill/>
         </p:spPr>
         <p:txBody>
-          <a:bodyPr wrap="square" anchor="t" lIns="45720" rIns="45720">
+          <a:bodyPr wrap="square" lIns="45720" rIns="45720" anchor="t">
             <a:spAutoFit/>
           </a:bodyPr>
           <a:lstStyle/>
@@ -5245,21 +5523,132 @@
                 </a:solidFill>
                 <a:latin typeface="Calibri"/>
               </a:rPr>
-              <a:t>How to actually choose between them for a real product.</a:t>
+              <a:t>Yocto can produce any of three package formats. Pick one.</a:t>
             </a:r>
           </a:p>
         </p:txBody>
       </p:sp>
       <p:sp>
         <p:nvSpPr>
-          <p:cNvPr id="4" name="TextBox 3"/>
+          <p:cNvPr id="4" name="Rectangle 3"/>
+          <p:cNvSpPr/>
+          <p:nvPr/>
+        </p:nvSpPr>
+        <p:spPr>
+          <a:xfrm>
+            <a:off x="640080" y="1783080"/>
+            <a:ext cx="3520440" cy="640080"/>
+          </a:xfrm>
+          <a:prstGeom prst="rect">
+            <a:avLst/>
+          </a:prstGeom>
+          <a:solidFill>
+            <a:srgbClr val="CC0066"/>
+          </a:solidFill>
+          <a:ln>
+            <a:noFill/>
+          </a:ln>
+          <a:effectLst/>
+        </p:spPr>
+        <p:style>
+          <a:lnRef idx="1">
+            <a:schemeClr val="accent1"/>
+          </a:lnRef>
+          <a:fillRef idx="3">
+            <a:schemeClr val="accent1"/>
+          </a:fillRef>
+          <a:effectRef idx="2">
+            <a:schemeClr val="accent1"/>
+          </a:effectRef>
+          <a:fontRef idx="minor">
+            <a:schemeClr val="lt1"/>
+          </a:fontRef>
+        </p:style>
+        <p:txBody>
+          <a:bodyPr lIns="182880" rtlCol="0" anchor="ctr"/>
+          <a:lstStyle/>
+          <a:p>
+            <a:pPr algn="ctr"/>
+            <a:r>
+              <a:rPr sz="2000" b="1">
+                <a:solidFill>
+                  <a:srgbClr val="FFFFFF"/>
+                </a:solidFill>
+                <a:latin typeface="Calibri"/>
+              </a:rPr>
+              <a:t>ipk</a:t>
+            </a:r>
+          </a:p>
+          <a:p>
+            <a:r>
+              <a:rPr sz="1200" i="1">
+                <a:solidFill>
+                  <a:srgbClr val="FFFFFF"/>
+                </a:solidFill>
+                <a:latin typeface="Calibri"/>
+              </a:rPr>
+              <a:t>Small embedded default</a:t>
+            </a:r>
+          </a:p>
+        </p:txBody>
+      </p:sp>
+      <p:sp>
+        <p:nvSpPr>
+          <p:cNvPr id="5" name="Rectangle 4"/>
+          <p:cNvSpPr/>
+          <p:nvPr/>
+        </p:nvSpPr>
+        <p:spPr>
+          <a:xfrm>
+            <a:off x="640080" y="2423160"/>
+            <a:ext cx="3520440" cy="3657600"/>
+          </a:xfrm>
+          <a:prstGeom prst="rect">
+            <a:avLst/>
+          </a:prstGeom>
+          <a:solidFill>
+            <a:srgbClr val="FAFAFA"/>
+          </a:solidFill>
+          <a:ln w="6350">
+            <a:solidFill>
+              <a:srgbClr val="CC0066"/>
+            </a:solidFill>
+          </a:ln>
+          <a:effectLst/>
+        </p:spPr>
+        <p:style>
+          <a:lnRef idx="1">
+            <a:schemeClr val="accent1"/>
+          </a:lnRef>
+          <a:fillRef idx="3">
+            <a:schemeClr val="accent1"/>
+          </a:fillRef>
+          <a:effectRef idx="2">
+            <a:schemeClr val="accent1"/>
+          </a:effectRef>
+          <a:fontRef idx="minor">
+            <a:schemeClr val="lt1"/>
+          </a:fontRef>
+        </p:style>
+        <p:txBody>
+          <a:bodyPr rtlCol="0" anchor="ctr"/>
+          <a:lstStyle/>
+          <a:p>
+            <a:pPr algn="ctr"/>
+            <a:endParaRPr/>
+          </a:p>
+        </p:txBody>
+      </p:sp>
+      <p:sp>
+        <p:nvSpPr>
+          <p:cNvPr id="6" name="TextBox 5"/>
           <p:cNvSpPr txBox="1"/>
           <p:nvPr/>
         </p:nvSpPr>
         <p:spPr>
           <a:xfrm>
-            <a:off x="822960" y="1783080"/>
-            <a:ext cx="10515600" cy="4572000"/>
+            <a:off x="731519" y="2514600"/>
+            <a:ext cx="3337560" cy="2718693"/>
           </a:xfrm>
           <a:prstGeom prst="rect">
             <a:avLst/>
@@ -5278,13 +5667,42 @@
               </a:spcAft>
             </a:pPr>
             <a:r>
-              <a:rPr sz="1500" b="1" i="0">
+              <a:rPr sz="1400" b="0" i="0">
+                <a:solidFill>
+                  <a:srgbClr val="333333"/>
+                </a:solidFill>
+                <a:latin typeface="Calibri"/>
+              </a:rPr>
+              <a:t>Origin: OpenWrt</a:t>
+            </a:r>
+          </a:p>
+          <a:p>
+            <a:pPr>
+              <a:spcAft>
+                <a:spcPts val="400"/>
+              </a:spcAft>
+            </a:pPr>
+            <a:endParaRPr sz="1400" b="0" i="0">
+              <a:solidFill>
+                <a:srgbClr val="333333"/>
+              </a:solidFill>
+              <a:latin typeface="Calibri"/>
+            </a:endParaRPr>
+          </a:p>
+          <a:p>
+            <a:pPr>
+              <a:spcAft>
+                <a:spcPts val="400"/>
+              </a:spcAft>
+            </a:pPr>
+            <a:r>
+              <a:rPr sz="1600" b="1" i="0">
                 <a:solidFill>
                   <a:srgbClr val="CC0066"/>
                 </a:solidFill>
                 <a:latin typeface="Calibri"/>
               </a:rPr>
-              <a:t>Pick ipk if</a:t>
+              <a:t>Pros:</a:t>
             </a:r>
           </a:p>
           <a:p>
@@ -5294,13 +5712,13 @@
               </a:spcAft>
             </a:pPr>
             <a:r>
-              <a:rPr sz="1300" b="0" i="0">
+              <a:rPr sz="1400" b="0" i="0">
                 <a:solidFill>
                   <a:srgbClr val="333333"/>
                 </a:solidFill>
                 <a:latin typeface="Calibri"/>
               </a:rPr>
-              <a:t>• Image size matters (every MB counts)</a:t>
+              <a:t>• Smallest overhead</a:t>
             </a:r>
           </a:p>
           <a:p>
@@ -5310,29 +5728,29 @@
               </a:spcAft>
             </a:pPr>
             <a:r>
-              <a:rPr sz="1300" b="0" i="0">
+              <a:rPr sz="1400" b="0" i="0">
                 <a:solidFill>
                   <a:srgbClr val="333333"/>
                 </a:solidFill>
                 <a:latin typeface="Calibri"/>
               </a:rPr>
-              <a:t>• You need fast on-target package install/update</a:t>
-            </a:r>
-          </a:p>
-          <a:p>
-            <a:pPr>
-              <a:spcAft>
-                <a:spcPts val="1000"/>
-              </a:spcAft>
-            </a:pPr>
-            <a:r>
-              <a:rPr sz="1300" b="0" i="0">
+              <a:t>• Fast on-target install</a:t>
+            </a:r>
+          </a:p>
+          <a:p>
+            <a:pPr>
+              <a:spcAft>
+                <a:spcPts val="400"/>
+              </a:spcAft>
+            </a:pPr>
+            <a:r>
+              <a:rPr sz="1400" b="0" i="0">
                 <a:solidFill>
                   <a:srgbClr val="333333"/>
                 </a:solidFill>
                 <a:latin typeface="Calibri"/>
               </a:rPr>
-              <a:t>• You'll use opkg feeds for OTA package updates</a:t>
+              <a:t>• Designed for embedded</a:t>
             </a:r>
           </a:p>
           <a:p>
@@ -5341,14 +5759,27 @@
                 <a:spcPts val="400"/>
               </a:spcAft>
             </a:pPr>
-            <a:r>
-              <a:rPr sz="1500" b="1" i="0">
+            <a:endParaRPr sz="1400" b="0" i="0">
+              <a:solidFill>
+                <a:srgbClr val="333333"/>
+              </a:solidFill>
+              <a:latin typeface="Calibri"/>
+            </a:endParaRPr>
+          </a:p>
+          <a:p>
+            <a:pPr>
+              <a:spcAft>
+                <a:spcPts val="400"/>
+              </a:spcAft>
+            </a:pPr>
+            <a:r>
+              <a:rPr sz="1600" b="1" i="0">
                 <a:solidFill>
                   <a:srgbClr val="CC0066"/>
                 </a:solidFill>
                 <a:latin typeface="Calibri"/>
               </a:rPr>
-              <a:t>Pick deb if</a:t>
+              <a:t>Use when:</a:t>
             </a:r>
           </a:p>
           <a:p>
@@ -5358,29 +5789,163 @@
               </a:spcAft>
             </a:pPr>
             <a:r>
-              <a:rPr sz="1300" b="0" i="0">
+              <a:rPr sz="1400" b="0" i="0">
                 <a:solidFill>
                   <a:srgbClr val="333333"/>
                 </a:solidFill>
                 <a:latin typeface="Calibri"/>
               </a:rPr>
-              <a:t>• Your team's muscle memory is apt</a:t>
-            </a:r>
-          </a:p>
-          <a:p>
-            <a:pPr>
-              <a:spcAft>
-                <a:spcPts val="1000"/>
-              </a:spcAft>
-            </a:pPr>
-            <a:r>
-              <a:rPr sz="1300" b="0" i="0">
+              <a:t>Most embedded products, especially when ipk feeds or opkg are involved</a:t>
+            </a:r>
+          </a:p>
+        </p:txBody>
+      </p:sp>
+      <p:sp>
+        <p:nvSpPr>
+          <p:cNvPr id="7" name="Rectangle 6"/>
+          <p:cNvSpPr/>
+          <p:nvPr/>
+        </p:nvSpPr>
+        <p:spPr>
+          <a:xfrm>
+            <a:off x="4297680" y="1783080"/>
+            <a:ext cx="3520440" cy="640080"/>
+          </a:xfrm>
+          <a:prstGeom prst="rect">
+            <a:avLst/>
+          </a:prstGeom>
+          <a:solidFill>
+            <a:srgbClr val="663399"/>
+          </a:solidFill>
+          <a:ln>
+            <a:noFill/>
+          </a:ln>
+          <a:effectLst/>
+        </p:spPr>
+        <p:style>
+          <a:lnRef idx="1">
+            <a:schemeClr val="accent1"/>
+          </a:lnRef>
+          <a:fillRef idx="3">
+            <a:schemeClr val="accent1"/>
+          </a:fillRef>
+          <a:effectRef idx="2">
+            <a:schemeClr val="accent1"/>
+          </a:effectRef>
+          <a:fontRef idx="minor">
+            <a:schemeClr val="lt1"/>
+          </a:fontRef>
+        </p:style>
+        <p:txBody>
+          <a:bodyPr lIns="182880" rtlCol="0" anchor="ctr"/>
+          <a:lstStyle/>
+          <a:p>
+            <a:pPr algn="ctr"/>
+            <a:r>
+              <a:rPr sz="2000" b="1">
+                <a:solidFill>
+                  <a:srgbClr val="FFFFFF"/>
+                </a:solidFill>
+                <a:latin typeface="Calibri"/>
+              </a:rPr>
+              <a:t>deb</a:t>
+            </a:r>
+          </a:p>
+          <a:p>
+            <a:r>
+              <a:rPr sz="1200" i="1">
+                <a:solidFill>
+                  <a:srgbClr val="FFFFFF"/>
+                </a:solidFill>
+                <a:latin typeface="Calibri"/>
+              </a:rPr>
+              <a:t>Debian-derived prod</a:t>
+            </a:r>
+          </a:p>
+        </p:txBody>
+      </p:sp>
+      <p:sp>
+        <p:nvSpPr>
+          <p:cNvPr id="8" name="Rectangle 7"/>
+          <p:cNvSpPr/>
+          <p:nvPr/>
+        </p:nvSpPr>
+        <p:spPr>
+          <a:xfrm>
+            <a:off x="4297680" y="2423160"/>
+            <a:ext cx="3520440" cy="3657600"/>
+          </a:xfrm>
+          <a:prstGeom prst="rect">
+            <a:avLst/>
+          </a:prstGeom>
+          <a:solidFill>
+            <a:srgbClr val="FAFAFA"/>
+          </a:solidFill>
+          <a:ln w="6350">
+            <a:solidFill>
+              <a:srgbClr val="663399"/>
+            </a:solidFill>
+          </a:ln>
+          <a:effectLst/>
+        </p:spPr>
+        <p:style>
+          <a:lnRef idx="1">
+            <a:schemeClr val="accent1"/>
+          </a:lnRef>
+          <a:fillRef idx="3">
+            <a:schemeClr val="accent1"/>
+          </a:fillRef>
+          <a:effectRef idx="2">
+            <a:schemeClr val="accent1"/>
+          </a:effectRef>
+          <a:fontRef idx="minor">
+            <a:schemeClr val="lt1"/>
+          </a:fontRef>
+        </p:style>
+        <p:txBody>
+          <a:bodyPr rtlCol="0" anchor="ctr"/>
+          <a:lstStyle/>
+          <a:p>
+            <a:pPr algn="ctr"/>
+            <a:endParaRPr/>
+          </a:p>
+        </p:txBody>
+      </p:sp>
+      <p:sp>
+        <p:nvSpPr>
+          <p:cNvPr id="9" name="TextBox 8"/>
+          <p:cNvSpPr txBox="1"/>
+          <p:nvPr/>
+        </p:nvSpPr>
+        <p:spPr>
+          <a:xfrm>
+            <a:off x="4389120" y="2514600"/>
+            <a:ext cx="3337560" cy="2718693"/>
+          </a:xfrm>
+          <a:prstGeom prst="rect">
+            <a:avLst/>
+          </a:prstGeom>
+          <a:noFill/>
+        </p:spPr>
+        <p:txBody>
+          <a:bodyPr wrap="square" lIns="45720" rIns="45720">
+            <a:spAutoFit/>
+          </a:bodyPr>
+          <a:lstStyle/>
+          <a:p>
+            <a:pPr>
+              <a:spcAft>
+                <a:spcPts val="400"/>
+              </a:spcAft>
+            </a:pPr>
+            <a:r>
+              <a:rPr sz="1400" b="0" i="0">
                 <a:solidFill>
                   <a:srgbClr val="333333"/>
                 </a:solidFill>
                 <a:latin typeface="Calibri"/>
               </a:rPr>
-              <a:t>• You're already shipping Debian on devices and want continuity</a:t>
+              <a:t>Origin: Debian/Ubuntu</a:t>
             </a:r>
           </a:p>
           <a:p>
@@ -5389,14 +5954,299 @@
                 <a:spcPts val="400"/>
               </a:spcAft>
             </a:pPr>
-            <a:r>
-              <a:rPr sz="1500" b="1" i="0">
+            <a:endParaRPr sz="1400" b="0" i="0">
+              <a:solidFill>
+                <a:srgbClr val="333333"/>
+              </a:solidFill>
+              <a:latin typeface="Calibri"/>
+            </a:endParaRPr>
+          </a:p>
+          <a:p>
+            <a:pPr>
+              <a:spcAft>
+                <a:spcPts val="400"/>
+              </a:spcAft>
+            </a:pPr>
+            <a:r>
+              <a:rPr sz="1600" b="1" i="0">
+                <a:solidFill>
+                  <a:srgbClr val="663399"/>
+                </a:solidFill>
+                <a:latin typeface="Calibri"/>
+              </a:rPr>
+              <a:t>Pros:</a:t>
+            </a:r>
+          </a:p>
+          <a:p>
+            <a:pPr>
+              <a:spcAft>
+                <a:spcPts val="400"/>
+              </a:spcAft>
+            </a:pPr>
+            <a:r>
+              <a:rPr sz="1400" b="0" i="0">
+                <a:solidFill>
+                  <a:srgbClr val="333333"/>
+                </a:solidFill>
+                <a:latin typeface="Calibri"/>
+              </a:rPr>
+              <a:t>• Familiar to Debian devs</a:t>
+            </a:r>
+          </a:p>
+          <a:p>
+            <a:pPr>
+              <a:spcAft>
+                <a:spcPts val="400"/>
+              </a:spcAft>
+            </a:pPr>
+            <a:r>
+              <a:rPr sz="1400" b="0" i="0">
+                <a:solidFill>
+                  <a:srgbClr val="333333"/>
+                </a:solidFill>
+                <a:latin typeface="Calibri"/>
+              </a:rPr>
+              <a:t>• Strong dependency support</a:t>
+            </a:r>
+          </a:p>
+          <a:p>
+            <a:pPr>
+              <a:spcAft>
+                <a:spcPts val="400"/>
+              </a:spcAft>
+            </a:pPr>
+            <a:r>
+              <a:rPr sz="1400" b="0" i="0">
+                <a:solidFill>
+                  <a:srgbClr val="333333"/>
+                </a:solidFill>
+                <a:latin typeface="Calibri"/>
+              </a:rPr>
+              <a:t>• Wide tooling</a:t>
+            </a:r>
+          </a:p>
+          <a:p>
+            <a:pPr>
+              <a:spcAft>
+                <a:spcPts val="400"/>
+              </a:spcAft>
+            </a:pPr>
+            <a:endParaRPr sz="1400" b="0" i="0">
+              <a:solidFill>
+                <a:srgbClr val="333333"/>
+              </a:solidFill>
+              <a:latin typeface="Calibri"/>
+            </a:endParaRPr>
+          </a:p>
+          <a:p>
+            <a:pPr>
+              <a:spcAft>
+                <a:spcPts val="400"/>
+              </a:spcAft>
+            </a:pPr>
+            <a:r>
+              <a:rPr sz="1600" b="1" i="0">
+                <a:solidFill>
+                  <a:srgbClr val="663399"/>
+                </a:solidFill>
+                <a:latin typeface="Calibri"/>
+              </a:rPr>
+              <a:t>Use when:</a:t>
+            </a:r>
+          </a:p>
+          <a:p>
+            <a:pPr>
+              <a:spcAft>
+                <a:spcPts val="400"/>
+              </a:spcAft>
+            </a:pPr>
+            <a:r>
+              <a:rPr sz="1400" b="0" i="0">
+                <a:solidFill>
+                  <a:srgbClr val="333333"/>
+                </a:solidFill>
+                <a:latin typeface="Calibri"/>
+              </a:rPr>
+              <a:t>Your team comes from Debian/Ubuntu and you want apt-like workflows</a:t>
+            </a:r>
+          </a:p>
+        </p:txBody>
+      </p:sp>
+      <p:sp>
+        <p:nvSpPr>
+          <p:cNvPr id="10" name="Rectangle 9"/>
+          <p:cNvSpPr/>
+          <p:nvPr/>
+        </p:nvSpPr>
+        <p:spPr>
+          <a:xfrm>
+            <a:off x="7955279" y="1783080"/>
+            <a:ext cx="3520440" cy="640080"/>
+          </a:xfrm>
+          <a:prstGeom prst="rect">
+            <a:avLst/>
+          </a:prstGeom>
+          <a:solidFill>
+            <a:srgbClr val="CC0066"/>
+          </a:solidFill>
+          <a:ln>
+            <a:noFill/>
+          </a:ln>
+          <a:effectLst/>
+        </p:spPr>
+        <p:style>
+          <a:lnRef idx="1">
+            <a:schemeClr val="accent1"/>
+          </a:lnRef>
+          <a:fillRef idx="3">
+            <a:schemeClr val="accent1"/>
+          </a:fillRef>
+          <a:effectRef idx="2">
+            <a:schemeClr val="accent1"/>
+          </a:effectRef>
+          <a:fontRef idx="minor">
+            <a:schemeClr val="lt1"/>
+          </a:fontRef>
+        </p:style>
+        <p:txBody>
+          <a:bodyPr lIns="182880" rtlCol="0" anchor="ctr"/>
+          <a:lstStyle/>
+          <a:p>
+            <a:pPr algn="ctr"/>
+            <a:r>
+              <a:rPr sz="2000" b="1">
+                <a:solidFill>
+                  <a:srgbClr val="FFFFFF"/>
+                </a:solidFill>
+                <a:latin typeface="Calibri"/>
+              </a:rPr>
+              <a:t>rpm</a:t>
+            </a:r>
+          </a:p>
+          <a:p>
+            <a:r>
+              <a:rPr sz="1200" i="1">
+                <a:solidFill>
+                  <a:srgbClr val="FFFFFF"/>
+                </a:solidFill>
+                <a:latin typeface="Calibri"/>
+              </a:rPr>
+              <a:t>Large/enterprise</a:t>
+            </a:r>
+          </a:p>
+        </p:txBody>
+      </p:sp>
+      <p:sp>
+        <p:nvSpPr>
+          <p:cNvPr id="11" name="Rectangle 10"/>
+          <p:cNvSpPr/>
+          <p:nvPr/>
+        </p:nvSpPr>
+        <p:spPr>
+          <a:xfrm>
+            <a:off x="7955279" y="2423160"/>
+            <a:ext cx="3520440" cy="3657600"/>
+          </a:xfrm>
+          <a:prstGeom prst="rect">
+            <a:avLst/>
+          </a:prstGeom>
+          <a:solidFill>
+            <a:srgbClr val="FAFAFA"/>
+          </a:solidFill>
+          <a:ln w="6350">
+            <a:solidFill>
+              <a:srgbClr val="CC0066"/>
+            </a:solidFill>
+          </a:ln>
+          <a:effectLst/>
+        </p:spPr>
+        <p:style>
+          <a:lnRef idx="1">
+            <a:schemeClr val="accent1"/>
+          </a:lnRef>
+          <a:fillRef idx="3">
+            <a:schemeClr val="accent1"/>
+          </a:fillRef>
+          <a:effectRef idx="2">
+            <a:schemeClr val="accent1"/>
+          </a:effectRef>
+          <a:fontRef idx="minor">
+            <a:schemeClr val="lt1"/>
+          </a:fontRef>
+        </p:style>
+        <p:txBody>
+          <a:bodyPr rtlCol="0" anchor="ctr"/>
+          <a:lstStyle/>
+          <a:p>
+            <a:pPr algn="ctr"/>
+            <a:endParaRPr/>
+          </a:p>
+        </p:txBody>
+      </p:sp>
+      <p:sp>
+        <p:nvSpPr>
+          <p:cNvPr id="12" name="TextBox 11"/>
+          <p:cNvSpPr txBox="1"/>
+          <p:nvPr/>
+        </p:nvSpPr>
+        <p:spPr>
+          <a:xfrm>
+            <a:off x="8046719" y="2514600"/>
+            <a:ext cx="3337560" cy="2718693"/>
+          </a:xfrm>
+          <a:prstGeom prst="rect">
+            <a:avLst/>
+          </a:prstGeom>
+          <a:noFill/>
+        </p:spPr>
+        <p:txBody>
+          <a:bodyPr wrap="square" lIns="45720" rIns="45720">
+            <a:spAutoFit/>
+          </a:bodyPr>
+          <a:lstStyle/>
+          <a:p>
+            <a:pPr>
+              <a:spcAft>
+                <a:spcPts val="400"/>
+              </a:spcAft>
+            </a:pPr>
+            <a:r>
+              <a:rPr sz="1400" b="0" i="0">
+                <a:solidFill>
+                  <a:srgbClr val="333333"/>
+                </a:solidFill>
+                <a:latin typeface="Calibri"/>
+              </a:rPr>
+              <a:t>Origin: Red Hat</a:t>
+            </a:r>
+          </a:p>
+          <a:p>
+            <a:pPr>
+              <a:spcAft>
+                <a:spcPts val="400"/>
+              </a:spcAft>
+            </a:pPr>
+            <a:endParaRPr sz="1400" b="0" i="0">
+              <a:solidFill>
+                <a:srgbClr val="333333"/>
+              </a:solidFill>
+              <a:latin typeface="Calibri"/>
+            </a:endParaRPr>
+          </a:p>
+          <a:p>
+            <a:pPr>
+              <a:spcAft>
+                <a:spcPts val="400"/>
+              </a:spcAft>
+            </a:pPr>
+            <a:r>
+              <a:rPr sz="1600" b="1" i="0">
                 <a:solidFill>
                   <a:srgbClr val="CC0066"/>
                 </a:solidFill>
                 <a:latin typeface="Calibri"/>
               </a:rPr>
-              <a:t>Pick rpm if</a:t>
+              <a:t>Pros:</a:t>
             </a:r>
           </a:p>
           <a:p>
@@ -5406,13 +6256,13 @@
               </a:spcAft>
             </a:pPr>
             <a:r>
-              <a:rPr sz="1300" b="0" i="0">
+              <a:rPr sz="1400" b="0" i="0">
                 <a:solidFill>
                   <a:srgbClr val="333333"/>
                 </a:solidFill>
                 <a:latin typeface="Calibri"/>
               </a:rPr>
-              <a:t>• Your infrastructure (Spacewalk, Satellite, etc.) is RPM-native</a:t>
+              <a:t>• Rich metadata, signing</a:t>
             </a:r>
           </a:p>
           <a:p>
@@ -5422,29 +6272,29 @@
               </a:spcAft>
             </a:pPr>
             <a:r>
-              <a:rPr sz="1300" b="0" i="0">
+              <a:rPr sz="1400" b="0" i="0">
                 <a:solidFill>
                   <a:srgbClr val="333333"/>
                 </a:solidFill>
                 <a:latin typeface="Calibri"/>
               </a:rPr>
-              <a:t>• Compliance/signing matters more than size</a:t>
-            </a:r>
-          </a:p>
-          <a:p>
-            <a:pPr>
-              <a:spcAft>
-                <a:spcPts val="1000"/>
-              </a:spcAft>
-            </a:pPr>
-            <a:r>
-              <a:rPr sz="1300" b="0" i="0">
+              <a:t>• Default in Poky</a:t>
+            </a:r>
+          </a:p>
+          <a:p>
+            <a:pPr>
+              <a:spcAft>
+                <a:spcPts val="400"/>
+              </a:spcAft>
+            </a:pPr>
+            <a:r>
+              <a:rPr sz="1400" b="0" i="0">
                 <a:solidFill>
                   <a:srgbClr val="333333"/>
                 </a:solidFill>
                 <a:latin typeface="Calibri"/>
               </a:rPr>
-              <a:t>• You don't mind the overhead</a:t>
+              <a:t>• Mature tooling</a:t>
             </a:r>
           </a:p>
           <a:p>
@@ -5453,30 +6303,96 @@
                 <a:spcPts val="400"/>
               </a:spcAft>
             </a:pPr>
-            <a:r>
-              <a:rPr sz="1500" b="1" i="0">
+            <a:endParaRPr sz="1400" b="0" i="0">
+              <a:solidFill>
+                <a:srgbClr val="333333"/>
+              </a:solidFill>
+              <a:latin typeface="Calibri"/>
+            </a:endParaRPr>
+          </a:p>
+          <a:p>
+            <a:pPr>
+              <a:spcAft>
+                <a:spcPts val="400"/>
+              </a:spcAft>
+            </a:pPr>
+            <a:r>
+              <a:rPr sz="1600" b="1" i="0">
+                <a:solidFill>
+                  <a:srgbClr val="CC0066"/>
+                </a:solidFill>
+                <a:latin typeface="Calibri"/>
+              </a:rPr>
+              <a:t>Use when:</a:t>
+            </a:r>
+          </a:p>
+          <a:p>
+            <a:pPr>
+              <a:spcAft>
+                <a:spcPts val="400"/>
+              </a:spcAft>
+            </a:pPr>
+            <a:r>
+              <a:rPr sz="1400" b="0" i="0">
+                <a:solidFill>
+                  <a:srgbClr val="333333"/>
+                </a:solidFill>
+                <a:latin typeface="Calibri"/>
+              </a:rPr>
+              <a:t>Compliance-heavy environments, RPM-based corporate infrastructure</a:t>
+            </a:r>
+          </a:p>
+        </p:txBody>
+      </p:sp>
+      <p:sp>
+        <p:nvSpPr>
+          <p:cNvPr id="13" name="Rounded Rectangle 12"/>
+          <p:cNvSpPr/>
+          <p:nvPr/>
+        </p:nvSpPr>
+        <p:spPr>
+          <a:xfrm>
+            <a:off x="822960" y="6172200"/>
+            <a:ext cx="10515600" cy="365760"/>
+          </a:xfrm>
+          <a:prstGeom prst="roundRect">
+            <a:avLst/>
+          </a:prstGeom>
+          <a:solidFill>
+            <a:srgbClr val="FBE6F0"/>
+          </a:solidFill>
+          <a:ln>
+            <a:noFill/>
+          </a:ln>
+          <a:effectLst/>
+        </p:spPr>
+        <p:style>
+          <a:lnRef idx="1">
+            <a:schemeClr val="accent1"/>
+          </a:lnRef>
+          <a:fillRef idx="3">
+            <a:schemeClr val="accent1"/>
+          </a:fillRef>
+          <a:effectRef idx="2">
+            <a:schemeClr val="accent1"/>
+          </a:effectRef>
+          <a:fontRef idx="minor">
+            <a:schemeClr val="lt1"/>
+          </a:fontRef>
+        </p:style>
+        <p:txBody>
+          <a:bodyPr wrap="square" lIns="228600" rIns="228600" rtlCol="0" anchor="ctr"/>
+          <a:lstStyle/>
+          <a:p>
+            <a:pPr algn="l"/>
+            <a:r>
+              <a:rPr sz="1200" b="1">
                 <a:solidFill>
                   <a:srgbClr val="663399"/>
                 </a:solidFill>
                 <a:latin typeface="Calibri"/>
               </a:rPr>
-              <a:t>Cannot decide?</a:t>
-            </a:r>
-          </a:p>
-          <a:p>
-            <a:pPr>
-              <a:spcAft>
-                <a:spcPts val="400"/>
-              </a:spcAft>
-            </a:pPr>
-            <a:r>
-              <a:rPr sz="1300" b="0" i="0">
-                <a:solidFill>
-                  <a:srgbClr val="333333"/>
-                </a:solidFill>
-                <a:latin typeface="Calibri"/>
-              </a:rPr>
-              <a:t>Use ipk. It's the safe default for almost any embedded product.</a:t>
+              <a:t>Set in local.conf:  PACKAGE_CLASSES = "package_ipk"  (or _deb / _rpm). Default is rpm.</a:t>
             </a:r>
           </a:p>
         </p:txBody>
@@ -5489,8 +6405,8 @@
 </p:sld>
 </file>
 
-<file path=ppt/slides/slide11.xml><?xml version="1.0" encoding="utf-8"?>
-<p:sld xmlns:a="http://schemas.openxmlformats.org/drawingml/2006/main" xmlns:p="http://schemas.openxmlformats.org/presentationml/2006/main" xmlns:r="http://schemas.openxmlformats.org/officeDocument/2006/relationships">
+<file path=ppt/slides/slide4.xml><?xml version="1.0" encoding="utf-8"?>
+<p:sld xmlns:a="http://schemas.openxmlformats.org/drawingml/2006/main" xmlns:r="http://schemas.openxmlformats.org/officeDocument/2006/relationships" xmlns:p="http://schemas.openxmlformats.org/presentationml/2006/main">
   <p:cSld>
     <p:spTree>
       <p:nvGrpSpPr>
@@ -5498,7 +6414,14 @@
         <p:cNvGrpSpPr/>
         <p:nvPr/>
       </p:nvGrpSpPr>
-      <p:grpSpPr/>
+      <p:grpSpPr>
+        <a:xfrm>
+          <a:off x="0" y="0"/>
+          <a:ext cx="0" cy="0"/>
+          <a:chOff x="0" y="0"/>
+          <a:chExt cx="0" cy="0"/>
+        </a:xfrm>
+      </p:grpSpPr>
       <p:sp>
         <p:nvSpPr>
           <p:cNvPr id="2" name="Title 1"/>
@@ -5515,13 +6438,10 @@
           <a:lstStyle/>
           <a:p>
             <a:r>
-              <a:rPr sz="3200" b="1">
-                <a:solidFill>
-                  <a:srgbClr val="CC0066"/>
-                </a:solidFill>
-                <a:latin typeface="Calibri"/>
-              </a:rPr>
-              <a:t>IMAGE_FEATURES — Pre-Packaged Personalities</a:t>
+              <a:rPr sz="3200" b="1" dirty="0">
+                <a:latin typeface="Calibri"/>
+              </a:rPr>
+              <a:t>Selection Criteria</a:t>
             </a:r>
           </a:p>
         </p:txBody>
@@ -5543,7 +6463,336 @@
           <a:noFill/>
         </p:spPr>
         <p:txBody>
-          <a:bodyPr wrap="square" anchor="t" lIns="45720" rIns="45720">
+          <a:bodyPr wrap="square" lIns="45720" rIns="45720" anchor="t">
+            <a:spAutoFit/>
+          </a:bodyPr>
+          <a:lstStyle/>
+          <a:p>
+            <a:pPr algn="l"/>
+            <a:r>
+              <a:rPr sz="1500" b="0" i="1">
+                <a:solidFill>
+                  <a:srgbClr val="666666"/>
+                </a:solidFill>
+                <a:latin typeface="Calibri"/>
+              </a:rPr>
+              <a:t>How to actually choose between them for a real product.</a:t>
+            </a:r>
+          </a:p>
+        </p:txBody>
+      </p:sp>
+      <p:sp>
+        <p:nvSpPr>
+          <p:cNvPr id="4" name="TextBox 3"/>
+          <p:cNvSpPr txBox="1"/>
+          <p:nvPr/>
+        </p:nvSpPr>
+        <p:spPr>
+          <a:xfrm>
+            <a:off x="822960" y="1783080"/>
+            <a:ext cx="10515600" cy="4262705"/>
+          </a:xfrm>
+          <a:prstGeom prst="rect">
+            <a:avLst/>
+          </a:prstGeom>
+          <a:noFill/>
+        </p:spPr>
+        <p:txBody>
+          <a:bodyPr wrap="square" lIns="45720" rIns="45720">
+            <a:spAutoFit/>
+          </a:bodyPr>
+          <a:lstStyle/>
+          <a:p>
+            <a:pPr>
+              <a:spcAft>
+                <a:spcPts val="400"/>
+              </a:spcAft>
+            </a:pPr>
+            <a:r>
+              <a:rPr b="1" i="0">
+                <a:solidFill>
+                  <a:srgbClr val="CC0066"/>
+                </a:solidFill>
+                <a:latin typeface="Calibri"/>
+              </a:rPr>
+              <a:t>Pick ipk if</a:t>
+            </a:r>
+          </a:p>
+          <a:p>
+            <a:pPr>
+              <a:spcAft>
+                <a:spcPts val="400"/>
+              </a:spcAft>
+            </a:pPr>
+            <a:r>
+              <a:rPr sz="1600" b="0" i="0">
+                <a:solidFill>
+                  <a:srgbClr val="333333"/>
+                </a:solidFill>
+                <a:latin typeface="Calibri"/>
+              </a:rPr>
+              <a:t>• Image size matters (every MB counts)</a:t>
+            </a:r>
+          </a:p>
+          <a:p>
+            <a:pPr>
+              <a:spcAft>
+                <a:spcPts val="400"/>
+              </a:spcAft>
+            </a:pPr>
+            <a:r>
+              <a:rPr sz="1600" b="0" i="0">
+                <a:solidFill>
+                  <a:srgbClr val="333333"/>
+                </a:solidFill>
+                <a:latin typeface="Calibri"/>
+              </a:rPr>
+              <a:t>• You need fast on-target package install/update</a:t>
+            </a:r>
+          </a:p>
+          <a:p>
+            <a:pPr>
+              <a:spcAft>
+                <a:spcPts val="1000"/>
+              </a:spcAft>
+            </a:pPr>
+            <a:r>
+              <a:rPr sz="1600" b="0" i="0">
+                <a:solidFill>
+                  <a:srgbClr val="333333"/>
+                </a:solidFill>
+                <a:latin typeface="Calibri"/>
+              </a:rPr>
+              <a:t>• You'll use opkg feeds for OTA package updates</a:t>
+            </a:r>
+          </a:p>
+          <a:p>
+            <a:pPr>
+              <a:spcAft>
+                <a:spcPts val="400"/>
+              </a:spcAft>
+            </a:pPr>
+            <a:r>
+              <a:rPr b="1" i="0">
+                <a:solidFill>
+                  <a:srgbClr val="CC0066"/>
+                </a:solidFill>
+                <a:latin typeface="Calibri"/>
+              </a:rPr>
+              <a:t>Pick deb if</a:t>
+            </a:r>
+          </a:p>
+          <a:p>
+            <a:pPr>
+              <a:spcAft>
+                <a:spcPts val="400"/>
+              </a:spcAft>
+            </a:pPr>
+            <a:r>
+              <a:rPr sz="1600" b="0" i="0">
+                <a:solidFill>
+                  <a:srgbClr val="333333"/>
+                </a:solidFill>
+                <a:latin typeface="Calibri"/>
+              </a:rPr>
+              <a:t>• Your team's muscle memory is apt</a:t>
+            </a:r>
+          </a:p>
+          <a:p>
+            <a:pPr>
+              <a:spcAft>
+                <a:spcPts val="1000"/>
+              </a:spcAft>
+            </a:pPr>
+            <a:r>
+              <a:rPr sz="1600" b="0" i="0">
+                <a:solidFill>
+                  <a:srgbClr val="333333"/>
+                </a:solidFill>
+                <a:latin typeface="Calibri"/>
+              </a:rPr>
+              <a:t>• You're already shipping Debian on devices and want continuity</a:t>
+            </a:r>
+          </a:p>
+          <a:p>
+            <a:pPr>
+              <a:spcAft>
+                <a:spcPts val="400"/>
+              </a:spcAft>
+            </a:pPr>
+            <a:r>
+              <a:rPr b="1" i="0">
+                <a:solidFill>
+                  <a:srgbClr val="CC0066"/>
+                </a:solidFill>
+                <a:latin typeface="Calibri"/>
+              </a:rPr>
+              <a:t>Pick rpm if</a:t>
+            </a:r>
+          </a:p>
+          <a:p>
+            <a:pPr>
+              <a:spcAft>
+                <a:spcPts val="400"/>
+              </a:spcAft>
+            </a:pPr>
+            <a:r>
+              <a:rPr sz="1600" b="0" i="0">
+                <a:solidFill>
+                  <a:srgbClr val="333333"/>
+                </a:solidFill>
+                <a:latin typeface="Calibri"/>
+              </a:rPr>
+              <a:t>• Your infrastructure (Spacewalk, Satellite, etc.) is RPM-native</a:t>
+            </a:r>
+          </a:p>
+          <a:p>
+            <a:pPr>
+              <a:spcAft>
+                <a:spcPts val="400"/>
+              </a:spcAft>
+            </a:pPr>
+            <a:r>
+              <a:rPr sz="1600" b="0" i="0">
+                <a:solidFill>
+                  <a:srgbClr val="333333"/>
+                </a:solidFill>
+                <a:latin typeface="Calibri"/>
+              </a:rPr>
+              <a:t>• Compliance/signing matters more than size</a:t>
+            </a:r>
+          </a:p>
+          <a:p>
+            <a:pPr>
+              <a:spcAft>
+                <a:spcPts val="1000"/>
+              </a:spcAft>
+            </a:pPr>
+            <a:r>
+              <a:rPr sz="1600" b="0" i="0">
+                <a:solidFill>
+                  <a:srgbClr val="333333"/>
+                </a:solidFill>
+                <a:latin typeface="Calibri"/>
+              </a:rPr>
+              <a:t>• You don't mind the overhead</a:t>
+            </a:r>
+          </a:p>
+          <a:p>
+            <a:pPr>
+              <a:spcAft>
+                <a:spcPts val="400"/>
+              </a:spcAft>
+            </a:pPr>
+            <a:r>
+              <a:rPr b="1" i="0">
+                <a:solidFill>
+                  <a:srgbClr val="663399"/>
+                </a:solidFill>
+                <a:latin typeface="Calibri"/>
+              </a:rPr>
+              <a:t>Cannot decide?</a:t>
+            </a:r>
+          </a:p>
+          <a:p>
+            <a:pPr>
+              <a:spcAft>
+                <a:spcPts val="400"/>
+              </a:spcAft>
+            </a:pPr>
+            <a:r>
+              <a:rPr sz="1600" b="0" i="0">
+                <a:solidFill>
+                  <a:srgbClr val="333333"/>
+                </a:solidFill>
+                <a:latin typeface="Calibri"/>
+              </a:rPr>
+              <a:t>Use ipk. It's the safe default for almost any embedded product.</a:t>
+            </a:r>
+          </a:p>
+        </p:txBody>
+      </p:sp>
+    </p:spTree>
+  </p:cSld>
+  <p:clrMapOvr>
+    <a:masterClrMapping/>
+  </p:clrMapOvr>
+</p:sld>
+</file>
+
+<file path=ppt/slides/slide5.xml><?xml version="1.0" encoding="utf-8"?>
+<p:sld xmlns:a="http://schemas.openxmlformats.org/drawingml/2006/main" xmlns:r="http://schemas.openxmlformats.org/officeDocument/2006/relationships" xmlns:p="http://schemas.openxmlformats.org/presentationml/2006/main">
+  <p:cSld>
+    <p:spTree>
+      <p:nvGrpSpPr>
+        <p:cNvPr id="1" name=""/>
+        <p:cNvGrpSpPr/>
+        <p:nvPr/>
+      </p:nvGrpSpPr>
+      <p:grpSpPr>
+        <a:xfrm>
+          <a:off x="0" y="0"/>
+          <a:ext cx="0" cy="0"/>
+          <a:chOff x="0" y="0"/>
+          <a:chExt cx="0" cy="0"/>
+        </a:xfrm>
+      </p:grpSpPr>
+      <p:sp>
+        <p:nvSpPr>
+          <p:cNvPr id="2" name="Title 1"/>
+          <p:cNvSpPr>
+            <a:spLocks noGrp="1"/>
+          </p:cNvSpPr>
+          <p:nvPr>
+            <p:ph type="title"/>
+          </p:nvPr>
+        </p:nvSpPr>
+        <p:spPr/>
+        <p:txBody>
+          <a:bodyPr/>
+          <a:lstStyle/>
+          <a:p>
+            <a:r>
+              <a:rPr sz="3200" b="1" dirty="0">
+                <a:latin typeface="Calibri"/>
+              </a:rPr>
+              <a:t>IMAGE_FEATURES</a:t>
+            </a:r>
+            <a:br>
+              <a:rPr lang="en-IN" sz="3200" b="1" dirty="0">
+                <a:latin typeface="Calibri"/>
+              </a:rPr>
+            </a:br>
+            <a:r>
+              <a:rPr sz="2400" b="1" dirty="0">
+                <a:latin typeface="Calibri"/>
+              </a:rPr>
+              <a:t>Pre-Packaged Personalities</a:t>
+            </a:r>
+            <a:endParaRPr sz="3200" b="1" dirty="0">
+              <a:latin typeface="Calibri"/>
+            </a:endParaRPr>
+          </a:p>
+        </p:txBody>
+      </p:sp>
+      <p:sp>
+        <p:nvSpPr>
+          <p:cNvPr id="3" name="TextBox 2"/>
+          <p:cNvSpPr txBox="1"/>
+          <p:nvPr/>
+        </p:nvSpPr>
+        <p:spPr>
+          <a:xfrm>
+            <a:off x="822960" y="1417320"/>
+            <a:ext cx="10515600" cy="365760"/>
+          </a:xfrm>
+          <a:prstGeom prst="rect">
+            <a:avLst/>
+          </a:prstGeom>
+          <a:noFill/>
+        </p:spPr>
+        <p:txBody>
+          <a:bodyPr wrap="square" lIns="45720" rIns="45720" anchor="t">
             <a:spAutoFit/>
           </a:bodyPr>
           <a:lstStyle/>
@@ -5604,6 +6853,7 @@
           <a:lstStyle/>
           <a:p>
             <a:pPr algn="ctr"/>
+            <a:endParaRPr/>
           </a:p>
         </p:txBody>
       </p:sp>
@@ -5648,6 +6898,7 @@
           <a:lstStyle/>
           <a:p>
             <a:pPr algn="ctr"/>
+            <a:endParaRPr/>
           </a:p>
         </p:txBody>
       </p:sp>
@@ -5660,7 +6911,7 @@
         <p:spPr>
           <a:xfrm>
             <a:off x="1005840" y="1874519"/>
-            <a:ext cx="10241280" cy="4389120"/>
+            <a:ext cx="10241280" cy="4031873"/>
           </a:xfrm>
           <a:prstGeom prst="rect">
             <a:avLst/>
@@ -5679,7 +6930,7 @@
               </a:spcAft>
             </a:pPr>
             <a:r>
-              <a:rPr sz="1100" i="1">
+              <a:rPr sz="1600" i="1">
                 <a:solidFill>
                   <a:srgbClr val="808080"/>
                 </a:solidFill>
@@ -5695,7 +6946,7 @@
               </a:spcAft>
             </a:pPr>
             <a:r>
-              <a:rPr sz="1100">
+              <a:rPr sz="1600">
                 <a:solidFill>
                   <a:srgbClr val="2D2D2D"/>
                 </a:solidFill>
@@ -5711,7 +6962,7 @@
               </a:spcAft>
             </a:pPr>
             <a:r>
-              <a:rPr sz="1100">
+              <a:rPr sz="1600">
                 <a:solidFill>
                   <a:srgbClr val="2D2D2D"/>
                 </a:solidFill>
@@ -5727,7 +6978,7 @@
               </a:spcAft>
             </a:pPr>
             <a:r>
-              <a:rPr sz="1100" i="1">
+              <a:rPr sz="1600" i="1">
                 <a:solidFill>
                   <a:srgbClr val="808080"/>
                 </a:solidFill>
@@ -5743,7 +6994,7 @@
               </a:spcAft>
             </a:pPr>
             <a:r>
-              <a:rPr sz="1100" i="1">
+              <a:rPr sz="1600" i="1">
                 <a:solidFill>
                   <a:srgbClr val="808080"/>
                 </a:solidFill>
@@ -5759,7 +7010,7 @@
               </a:spcAft>
             </a:pPr>
             <a:r>
-              <a:rPr sz="1100" i="1">
+              <a:rPr sz="1600" i="1">
                 <a:solidFill>
                   <a:srgbClr val="808080"/>
                 </a:solidFill>
@@ -5775,7 +7026,7 @@
               </a:spcAft>
             </a:pPr>
             <a:r>
-              <a:rPr sz="1100" i="1">
+              <a:rPr sz="1600" i="1">
                 <a:solidFill>
                   <a:srgbClr val="808080"/>
                 </a:solidFill>
@@ -5791,7 +7042,7 @@
               </a:spcAft>
             </a:pPr>
             <a:r>
-              <a:rPr sz="1100" i="1">
+              <a:rPr sz="1600" i="1">
                 <a:solidFill>
                   <a:srgbClr val="808080"/>
                 </a:solidFill>
@@ -5807,7 +7058,7 @@
               </a:spcAft>
             </a:pPr>
             <a:r>
-              <a:rPr sz="1100" i="1">
+              <a:rPr sz="1600" i="1">
                 <a:solidFill>
                   <a:srgbClr val="808080"/>
                 </a:solidFill>
@@ -5823,7 +7074,7 @@
               </a:spcAft>
             </a:pPr>
             <a:r>
-              <a:rPr sz="1100" i="1">
+              <a:rPr sz="1600" i="1">
                 <a:solidFill>
                   <a:srgbClr val="808080"/>
                 </a:solidFill>
@@ -5839,7 +7090,7 @@
               </a:spcAft>
             </a:pPr>
             <a:r>
-              <a:rPr sz="1100" i="1">
+              <a:rPr sz="1600" i="1">
                 <a:solidFill>
                   <a:srgbClr val="808080"/>
                 </a:solidFill>
@@ -5855,7 +7106,7 @@
               </a:spcAft>
             </a:pPr>
             <a:r>
-              <a:rPr sz="1100" i="1">
+              <a:rPr sz="1600" i="1">
                 <a:solidFill>
                   <a:srgbClr val="808080"/>
                 </a:solidFill>
@@ -5871,7 +7122,7 @@
               </a:spcAft>
             </a:pPr>
             <a:r>
-              <a:rPr sz="1100">
+              <a:rPr sz="1600">
                 <a:solidFill>
                   <a:srgbClr val="2D2D2D"/>
                 </a:solidFill>
@@ -5887,7 +7138,7 @@
               </a:spcAft>
             </a:pPr>
             <a:r>
-              <a:rPr sz="1100" i="1">
+              <a:rPr sz="1600" i="1">
                 <a:solidFill>
                   <a:srgbClr val="808080"/>
                 </a:solidFill>
@@ -5903,7 +7154,7 @@
               </a:spcAft>
             </a:pPr>
             <a:r>
-              <a:rPr sz="1100" i="1">
+              <a:rPr sz="1600" i="1">
                 <a:solidFill>
                   <a:srgbClr val="808080"/>
                 </a:solidFill>
@@ -5919,7 +7170,7 @@
               </a:spcAft>
             </a:pPr>
             <a:r>
-              <a:rPr sz="1100" i="1">
+              <a:rPr sz="1600" i="1">
                 <a:solidFill>
                   <a:srgbClr val="808080"/>
                 </a:solidFill>
@@ -5938,8 +7189,8 @@
 </p:sld>
 </file>
 
-<file path=ppt/slides/slide12.xml><?xml version="1.0" encoding="utf-8"?>
-<p:sld xmlns:a="http://schemas.openxmlformats.org/drawingml/2006/main" xmlns:p="http://schemas.openxmlformats.org/presentationml/2006/main" xmlns:r="http://schemas.openxmlformats.org/officeDocument/2006/relationships">
+<file path=ppt/slides/slide6.xml><?xml version="1.0" encoding="utf-8"?>
+<p:sld xmlns:a="http://schemas.openxmlformats.org/drawingml/2006/main" xmlns:r="http://schemas.openxmlformats.org/officeDocument/2006/relationships" xmlns:p="http://schemas.openxmlformats.org/presentationml/2006/main">
   <p:cSld>
     <p:spTree>
       <p:nvGrpSpPr>
@@ -5947,7 +7198,14 @@
         <p:cNvGrpSpPr/>
         <p:nvPr/>
       </p:nvGrpSpPr>
-      <p:grpSpPr/>
+      <p:grpSpPr>
+        <a:xfrm>
+          <a:off x="0" y="0"/>
+          <a:ext cx="0" cy="0"/>
+          <a:chOff x="0" y="0"/>
+          <a:chExt cx="0" cy="0"/>
+        </a:xfrm>
+      </p:grpSpPr>
       <p:sp>
         <p:nvSpPr>
           <p:cNvPr id="2" name="Title 1"/>
@@ -5964,13 +7222,22 @@
           <a:lstStyle/>
           <a:p>
             <a:r>
-              <a:rPr sz="3200" b="1">
-                <a:solidFill>
-                  <a:srgbClr val="CC0066"/>
-                </a:solidFill>
-                <a:latin typeface="Calibri"/>
-              </a:rPr>
-              <a:t>Packagegroups — Bundling</a:t>
+              <a:rPr sz="3200" b="1" dirty="0" err="1">
+                <a:latin typeface="Calibri"/>
+              </a:rPr>
+              <a:t>Packagegroups</a:t>
+            </a:r>
+            <a:r>
+              <a:rPr lang="en-IN" sz="3200" b="1" dirty="0">
+                <a:latin typeface="Calibri"/>
+              </a:rPr>
+              <a:t>: </a:t>
+            </a:r>
+            <a:r>
+              <a:rPr sz="3200" b="1" dirty="0">
+                <a:latin typeface="Calibri"/>
+              </a:rPr>
+              <a:t>Bundling</a:t>
             </a:r>
           </a:p>
         </p:txBody>
@@ -5992,7 +7259,7 @@
           <a:noFill/>
         </p:spPr>
         <p:txBody>
-          <a:bodyPr wrap="square" anchor="t" lIns="45720" rIns="45720">
+          <a:bodyPr wrap="square" lIns="45720" rIns="45720" anchor="t">
             <a:spAutoFit/>
           </a:bodyPr>
           <a:lstStyle/>
@@ -6053,6 +7320,7 @@
           <a:lstStyle/>
           <a:p>
             <a:pPr algn="ctr"/>
+            <a:endParaRPr/>
           </a:p>
         </p:txBody>
       </p:sp>
@@ -6097,6 +7365,7 @@
           <a:lstStyle/>
           <a:p>
             <a:pPr algn="ctr"/>
+            <a:endParaRPr/>
           </a:p>
         </p:txBody>
       </p:sp>
@@ -6108,8 +7377,8 @@
         </p:nvSpPr>
         <p:spPr>
           <a:xfrm>
-            <a:off x="1005840" y="1874519"/>
-            <a:ext cx="10241280" cy="4389120"/>
+            <a:off x="1097280" y="1806922"/>
+            <a:ext cx="10241280" cy="4524315"/>
           </a:xfrm>
           <a:prstGeom prst="rect">
             <a:avLst/>
@@ -6128,13 +7397,31 @@
               </a:spcAft>
             </a:pPr>
             <a:r>
-              <a:rPr sz="1100" i="1">
+              <a:rPr sz="1600" i="1" dirty="0">
                 <a:solidFill>
                   <a:srgbClr val="808080"/>
                 </a:solidFill>
                 <a:latin typeface="Consolas"/>
               </a:rPr>
-              <a:t># A packagegroup recipe in your layer:</a:t>
+              <a:t># A </a:t>
+            </a:r>
+            <a:r>
+              <a:rPr sz="1600" i="1" dirty="0" err="1">
+                <a:solidFill>
+                  <a:srgbClr val="808080"/>
+                </a:solidFill>
+                <a:latin typeface="Consolas"/>
+              </a:rPr>
+              <a:t>packagegroup</a:t>
+            </a:r>
+            <a:r>
+              <a:rPr sz="1600" i="1" dirty="0">
+                <a:solidFill>
+                  <a:srgbClr val="808080"/>
+                </a:solidFill>
+                <a:latin typeface="Consolas"/>
+              </a:rPr>
+              <a:t> recipe in your layer:</a:t>
             </a:r>
           </a:p>
           <a:p>
@@ -6144,7 +7431,7 @@
               </a:spcAft>
             </a:pPr>
             <a:r>
-              <a:rPr sz="1100" i="1">
+              <a:rPr sz="1600" i="1" dirty="0">
                 <a:solidFill>
                   <a:srgbClr val="808080"/>
                 </a:solidFill>
@@ -6160,7 +7447,7 @@
               </a:spcAft>
             </a:pPr>
             <a:r>
-              <a:rPr sz="1100">
+              <a:rPr sz="1600" dirty="0">
                 <a:solidFill>
                   <a:srgbClr val="2D2D2D"/>
                 </a:solidFill>
@@ -6176,13 +7463,31 @@
               </a:spcAft>
             </a:pPr>
             <a:r>
-              <a:rPr sz="1100">
+              <a:rPr sz="1600" dirty="0">
                 <a:solidFill>
                   <a:srgbClr val="2D2D2D"/>
                 </a:solidFill>
                 <a:latin typeface="Consolas"/>
               </a:rPr>
-              <a:t>SUMMARY = "Core packages for TrainerGW image"</a:t>
+              <a:t>SUMMARY = "Core packages for </a:t>
+            </a:r>
+            <a:r>
+              <a:rPr sz="1600" dirty="0" err="1">
+                <a:solidFill>
+                  <a:srgbClr val="2D2D2D"/>
+                </a:solidFill>
+                <a:latin typeface="Consolas"/>
+              </a:rPr>
+              <a:t>TrainerGW</a:t>
+            </a:r>
+            <a:r>
+              <a:rPr sz="1600" dirty="0">
+                <a:solidFill>
+                  <a:srgbClr val="2D2D2D"/>
+                </a:solidFill>
+                <a:latin typeface="Consolas"/>
+              </a:rPr>
+              <a:t> image"</a:t>
             </a:r>
           </a:p>
           <a:p>
@@ -6192,7 +7497,7 @@
               </a:spcAft>
             </a:pPr>
             <a:r>
-              <a:rPr sz="1100">
+              <a:rPr sz="1600" dirty="0">
                 <a:solidFill>
                   <a:srgbClr val="2D2D2D"/>
                 </a:solidFill>
@@ -6208,7 +7513,7 @@
               </a:spcAft>
             </a:pPr>
             <a:r>
-              <a:rPr sz="1100">
+              <a:rPr sz="1600" dirty="0">
                 <a:solidFill>
                   <a:srgbClr val="2D2D2D"/>
                 </a:solidFill>
@@ -6224,14 +7529,29 @@
               </a:spcAft>
             </a:pPr>
             <a:r>
-              <a:rPr sz="1100">
+              <a:rPr sz="1600" dirty="0">
                 <a:solidFill>
                   <a:srgbClr val="2D2D2D"/>
                 </a:solidFill>
                 <a:latin typeface="Consolas"/>
               </a:rPr>
-              <a:t>inherit packagegroup</a:t>
-            </a:r>
+              <a:t>inherit </a:t>
+            </a:r>
+            <a:r>
+              <a:rPr sz="1600" dirty="0" err="1">
+                <a:solidFill>
+                  <a:srgbClr val="2D2D2D"/>
+                </a:solidFill>
+                <a:latin typeface="Consolas"/>
+              </a:rPr>
+              <a:t>packagegroup</a:t>
+            </a:r>
+            <a:endParaRPr sz="1600" dirty="0">
+              <a:solidFill>
+                <a:srgbClr val="2D2D2D"/>
+              </a:solidFill>
+              <a:latin typeface="Consolas"/>
+            </a:endParaRPr>
           </a:p>
           <a:p>
             <a:pPr>
@@ -6240,7 +7560,7 @@
               </a:spcAft>
             </a:pPr>
             <a:r>
-              <a:rPr sz="1100">
+              <a:rPr sz="1600" dirty="0">
                 <a:solidFill>
                   <a:srgbClr val="2D2D2D"/>
                 </a:solidFill>
@@ -6256,7 +7576,7 @@
               </a:spcAft>
             </a:pPr>
             <a:r>
-              <a:rPr sz="1100">
+              <a:rPr sz="1600" dirty="0">
                 <a:solidFill>
                   <a:srgbClr val="2D2D2D"/>
                 </a:solidFill>
@@ -6272,7 +7592,7 @@
               </a:spcAft>
             </a:pPr>
             <a:r>
-              <a:rPr sz="1100">
+              <a:rPr sz="1600" dirty="0">
                 <a:solidFill>
                   <a:srgbClr val="2D2D2D"/>
                 </a:solidFill>
@@ -6288,13 +7608,31 @@
               </a:spcAft>
             </a:pPr>
             <a:r>
-              <a:rPr sz="1100">
+              <a:rPr sz="1600" dirty="0">
                 <a:solidFill>
                   <a:srgbClr val="2D2D2D"/>
                 </a:solidFill>
                 <a:latin typeface="Consolas"/>
               </a:rPr>
-              <a:t>    hello-trainergw \</a:t>
+              <a:t>    hello-</a:t>
+            </a:r>
+            <a:r>
+              <a:rPr sz="1600" dirty="0" err="1">
+                <a:solidFill>
+                  <a:srgbClr val="2D2D2D"/>
+                </a:solidFill>
+                <a:latin typeface="Consolas"/>
+              </a:rPr>
+              <a:t>trainergw</a:t>
+            </a:r>
+            <a:r>
+              <a:rPr sz="1600" dirty="0">
+                <a:solidFill>
+                  <a:srgbClr val="2D2D2D"/>
+                </a:solidFill>
+                <a:latin typeface="Consolas"/>
+              </a:rPr>
+              <a:t> \</a:t>
             </a:r>
           </a:p>
           <a:p>
@@ -6304,13 +7642,31 @@
               </a:spcAft>
             </a:pPr>
             <a:r>
-              <a:rPr sz="1100">
+              <a:rPr sz="1600" dirty="0">
                 <a:solidFill>
                   <a:srgbClr val="2D2D2D"/>
                 </a:solidFill>
                 <a:latin typeface="Consolas"/>
               </a:rPr>
-              <a:t>    systemd-analyze \</a:t>
+              <a:t>    </a:t>
+            </a:r>
+            <a:r>
+              <a:rPr sz="1600" dirty="0" err="1">
+                <a:solidFill>
+                  <a:srgbClr val="2D2D2D"/>
+                </a:solidFill>
+                <a:latin typeface="Consolas"/>
+              </a:rPr>
+              <a:t>systemd</a:t>
+            </a:r>
+            <a:r>
+              <a:rPr sz="1600" dirty="0">
+                <a:solidFill>
+                  <a:srgbClr val="2D2D2D"/>
+                </a:solidFill>
+                <a:latin typeface="Consolas"/>
+              </a:rPr>
+              <a:t>-analyze \</a:t>
             </a:r>
           </a:p>
           <a:p>
@@ -6320,13 +7676,31 @@
               </a:spcAft>
             </a:pPr>
             <a:r>
-              <a:rPr sz="1100">
+              <a:rPr sz="1600" dirty="0">
                 <a:solidFill>
                   <a:srgbClr val="2D2D2D"/>
                 </a:solidFill>
                 <a:latin typeface="Consolas"/>
               </a:rPr>
-              <a:t>    chrony \</a:t>
+              <a:t>    </a:t>
+            </a:r>
+            <a:r>
+              <a:rPr sz="1600" dirty="0" err="1">
+                <a:solidFill>
+                  <a:srgbClr val="2D2D2D"/>
+                </a:solidFill>
+                <a:latin typeface="Consolas"/>
+              </a:rPr>
+              <a:t>chrony</a:t>
+            </a:r>
+            <a:r>
+              <a:rPr sz="1600" dirty="0">
+                <a:solidFill>
+                  <a:srgbClr val="2D2D2D"/>
+                </a:solidFill>
+                <a:latin typeface="Consolas"/>
+              </a:rPr>
+              <a:t> \</a:t>
             </a:r>
           </a:p>
           <a:p>
@@ -6336,7 +7710,7 @@
               </a:spcAft>
             </a:pPr>
             <a:r>
-              <a:rPr sz="1100">
+              <a:rPr sz="1600" dirty="0">
                 <a:solidFill>
                   <a:srgbClr val="2D2D2D"/>
                 </a:solidFill>
@@ -6352,7 +7726,7 @@
               </a:spcAft>
             </a:pPr>
             <a:r>
-              <a:rPr sz="1100">
+              <a:rPr sz="1600" dirty="0">
                 <a:solidFill>
                   <a:srgbClr val="2D2D2D"/>
                 </a:solidFill>
@@ -6368,7 +7742,7 @@
               </a:spcAft>
             </a:pPr>
             <a:r>
-              <a:rPr sz="1100">
+              <a:rPr sz="1600" dirty="0">
                 <a:solidFill>
                   <a:srgbClr val="2D2D2D"/>
                 </a:solidFill>
@@ -6384,7 +7758,7 @@
               </a:spcAft>
             </a:pPr>
             <a:r>
-              <a:rPr sz="1100" i="1">
+              <a:rPr sz="1600" i="1" dirty="0">
                 <a:solidFill>
                   <a:srgbClr val="808080"/>
                 </a:solidFill>
@@ -6400,13 +7774,58 @@
               </a:spcAft>
             </a:pPr>
             <a:r>
-              <a:rPr sz="1100">
+              <a:rPr sz="1600" dirty="0" err="1">
                 <a:solidFill>
                   <a:srgbClr val="2D2D2D"/>
                 </a:solidFill>
                 <a:latin typeface="Consolas"/>
               </a:rPr>
-              <a:t>IMAGE_INSTALL:append = " packagegroup-trainergw-core"</a:t>
+              <a:t>IMAGE_INSTALL:append</a:t>
+            </a:r>
+            <a:r>
+              <a:rPr sz="1600" dirty="0">
+                <a:solidFill>
+                  <a:srgbClr val="2D2D2D"/>
+                </a:solidFill>
+                <a:latin typeface="Consolas"/>
+              </a:rPr>
+              <a:t> = " </a:t>
+            </a:r>
+            <a:r>
+              <a:rPr sz="1600" dirty="0" err="1">
+                <a:solidFill>
+                  <a:srgbClr val="2D2D2D"/>
+                </a:solidFill>
+                <a:latin typeface="Consolas"/>
+              </a:rPr>
+              <a:t>packagegroup</a:t>
+            </a:r>
+            <a:r>
+              <a:rPr sz="1600" dirty="0">
+                <a:solidFill>
+                  <a:srgbClr val="2D2D2D"/>
+                </a:solidFill>
+                <a:latin typeface="Consolas"/>
+              </a:rPr>
+              <a:t>-</a:t>
+            </a:r>
+            <a:r>
+              <a:rPr sz="1600" dirty="0" err="1">
+                <a:solidFill>
+                  <a:srgbClr val="2D2D2D"/>
+                </a:solidFill>
+                <a:latin typeface="Consolas"/>
+              </a:rPr>
+              <a:t>trainergw</a:t>
+            </a:r>
+            <a:r>
+              <a:rPr sz="1600" dirty="0">
+                <a:solidFill>
+                  <a:srgbClr val="2D2D2D"/>
+                </a:solidFill>
+                <a:latin typeface="Consolas"/>
+              </a:rPr>
+              <a:t>-core"</a:t>
             </a:r>
           </a:p>
         </p:txBody>
@@ -6419,8 +7838,8 @@
 </p:sld>
 </file>
 
-<file path=ppt/slides/slide13.xml><?xml version="1.0" encoding="utf-8"?>
-<p:sld xmlns:a="http://schemas.openxmlformats.org/drawingml/2006/main" xmlns:p="http://schemas.openxmlformats.org/presentationml/2006/main" xmlns:r="http://schemas.openxmlformats.org/officeDocument/2006/relationships">
+<file path=ppt/slides/slide7.xml><?xml version="1.0" encoding="utf-8"?>
+<p:sld xmlns:a="http://schemas.openxmlformats.org/drawingml/2006/main" xmlns:r="http://schemas.openxmlformats.org/officeDocument/2006/relationships" xmlns:p="http://schemas.openxmlformats.org/presentationml/2006/main">
   <p:cSld>
     <p:spTree>
       <p:nvGrpSpPr>
@@ -6428,7 +7847,14 @@
         <p:cNvGrpSpPr/>
         <p:nvPr/>
       </p:nvGrpSpPr>
-      <p:grpSpPr/>
+      <p:grpSpPr>
+        <a:xfrm>
+          <a:off x="0" y="0"/>
+          <a:ext cx="0" cy="0"/>
+          <a:chOff x="0" y="0"/>
+          <a:chExt cx="0" cy="0"/>
+        </a:xfrm>
+      </p:grpSpPr>
       <p:sp>
         <p:nvSpPr>
           <p:cNvPr id="2" name="Title 1"/>
@@ -6445,13 +7871,10 @@
           <a:lstStyle/>
           <a:p>
             <a:r>
-              <a:rPr sz="3200" b="1">
-                <a:solidFill>
-                  <a:srgbClr val="CC0066"/>
-                </a:solidFill>
-                <a:latin typeface="Calibri"/>
-              </a:rPr>
-              <a:t>Distro vs Machine vs Image Features</a:t>
+              <a:rPr sz="3200" b="1" dirty="0">
+                <a:latin typeface="Calibri"/>
+              </a:rPr>
+              <a:t>Distro vs Machine vs Image</a:t>
             </a:r>
           </a:p>
         </p:txBody>
@@ -6464,7 +7887,7 @@
         </p:nvSpPr>
         <p:spPr>
           <a:xfrm>
-            <a:off x="822960" y="1417320"/>
+            <a:off x="640080" y="1096994"/>
             <a:ext cx="10515600" cy="365760"/>
           </a:xfrm>
           <a:prstGeom prst="rect">
@@ -6473,7 +7896,7 @@
           <a:noFill/>
         </p:spPr>
         <p:txBody>
-          <a:bodyPr wrap="square" anchor="t" lIns="45720" rIns="45720">
+          <a:bodyPr wrap="square" lIns="45720" rIns="45720" anchor="t">
             <a:spAutoFit/>
           </a:bodyPr>
           <a:lstStyle/>
@@ -6499,7 +7922,7 @@
         </p:nvSpPr>
         <p:spPr>
           <a:xfrm>
-            <a:off x="640080" y="1783080"/>
+            <a:off x="662940" y="1462754"/>
             <a:ext cx="3520440" cy="640080"/>
           </a:xfrm>
           <a:prstGeom prst="rect">
@@ -6528,7 +7951,7 @@
           </a:fontRef>
         </p:style>
         <p:txBody>
-          <a:bodyPr rtlCol="0" anchor="ctr" lIns="182880"/>
+          <a:bodyPr lIns="182880" rtlCol="0" anchor="ctr"/>
           <a:lstStyle/>
           <a:p>
             <a:pPr algn="ctr"/>
@@ -6563,7 +7986,7 @@
         </p:nvSpPr>
         <p:spPr>
           <a:xfrm>
-            <a:off x="640080" y="2423160"/>
+            <a:off x="662940" y="2102834"/>
             <a:ext cx="3520440" cy="3840480"/>
           </a:xfrm>
           <a:prstGeom prst="rect">
@@ -6598,6 +8021,7 @@
           <a:lstStyle/>
           <a:p>
             <a:pPr algn="ctr"/>
+            <a:endParaRPr/>
           </a:p>
         </p:txBody>
       </p:sp>
@@ -6609,8 +8033,8 @@
         </p:nvSpPr>
         <p:spPr>
           <a:xfrm>
-            <a:off x="731519" y="2514600"/>
-            <a:ext cx="3337560" cy="3657600"/>
+            <a:off x="754379" y="2194274"/>
+            <a:ext cx="3337560" cy="3344505"/>
           </a:xfrm>
           <a:prstGeom prst="rect">
             <a:avLst/>
@@ -6629,7 +8053,7 @@
               </a:spcAft>
             </a:pPr>
             <a:r>
-              <a:rPr sz="1100" b="0" i="0">
+              <a:rPr sz="1600" b="0" i="0">
                 <a:solidFill>
                   <a:srgbClr val="333333"/>
                 </a:solidFill>
@@ -6644,14 +8068,43 @@
                 <a:spcPts val="400"/>
               </a:spcAft>
             </a:pPr>
-            <a:r>
-              <a:rPr sz="1100" b="0" i="0">
+            <a:endParaRPr sz="1600" b="0" i="0">
+              <a:solidFill>
+                <a:srgbClr val="333333"/>
+              </a:solidFill>
+              <a:latin typeface="Calibri"/>
+            </a:endParaRPr>
+          </a:p>
+          <a:p>
+            <a:pPr>
+              <a:spcAft>
+                <a:spcPts val="400"/>
+              </a:spcAft>
+            </a:pPr>
+            <a:r>
+              <a:rPr b="1" i="0">
+                <a:solidFill>
+                  <a:srgbClr val="CC0066"/>
+                </a:solidFill>
+                <a:latin typeface="Calibri"/>
+              </a:rPr>
+              <a:t>Examples:</a:t>
+            </a:r>
+          </a:p>
+          <a:p>
+            <a:pPr>
+              <a:spcAft>
+                <a:spcPts val="400"/>
+              </a:spcAft>
+            </a:pPr>
+            <a:r>
+              <a:rPr sz="1600" b="0" i="0">
                 <a:solidFill>
                   <a:srgbClr val="333333"/>
                 </a:solidFill>
                 <a:latin typeface="Calibri"/>
               </a:rPr>
-              <a:t/>
+              <a:t>wifi, bluetooth, opengl,</a:t>
             </a:r>
           </a:p>
           <a:p>
@@ -6661,13 +8114,13 @@
               </a:spcAft>
             </a:pPr>
             <a:r>
-              <a:rPr sz="1200" b="1" i="0">
-                <a:solidFill>
-                  <a:srgbClr val="CC0066"/>
-                </a:solidFill>
-                <a:latin typeface="Calibri"/>
-              </a:rPr>
-              <a:t>Examples:</a:t>
+              <a:rPr sz="1600" b="0" i="0">
+                <a:solidFill>
+                  <a:srgbClr val="333333"/>
+                </a:solidFill>
+                <a:latin typeface="Calibri"/>
+              </a:rPr>
+              <a:t>x11, ipv6, alsa, pam</a:t>
             </a:r>
           </a:p>
           <a:p>
@@ -6676,14 +8129,27 @@
                 <a:spcPts val="400"/>
               </a:spcAft>
             </a:pPr>
-            <a:r>
-              <a:rPr sz="1100" b="0" i="0">
+            <a:endParaRPr sz="1600" b="0" i="0">
+              <a:solidFill>
+                <a:srgbClr val="333333"/>
+              </a:solidFill>
+              <a:latin typeface="Calibri"/>
+            </a:endParaRPr>
+          </a:p>
+          <a:p>
+            <a:pPr>
+              <a:spcAft>
+                <a:spcPts val="400"/>
+              </a:spcAft>
+            </a:pPr>
+            <a:r>
+              <a:rPr sz="1600" b="0" i="0">
                 <a:solidFill>
                   <a:srgbClr val="333333"/>
                 </a:solidFill>
                 <a:latin typeface="Calibri"/>
               </a:rPr>
-              <a:t>wifi, bluetooth, opengl,</a:t>
+              <a:t>Set in distro conf</a:t>
             </a:r>
           </a:p>
           <a:p>
@@ -6692,14 +8158,27 @@
                 <a:spcPts val="400"/>
               </a:spcAft>
             </a:pPr>
-            <a:r>
-              <a:rPr sz="1100" b="0" i="0">
+            <a:endParaRPr sz="1600" b="0" i="0">
+              <a:solidFill>
+                <a:srgbClr val="333333"/>
+              </a:solidFill>
+              <a:latin typeface="Calibri"/>
+            </a:endParaRPr>
+          </a:p>
+          <a:p>
+            <a:pPr>
+              <a:spcAft>
+                <a:spcPts val="400"/>
+              </a:spcAft>
+            </a:pPr>
+            <a:r>
+              <a:rPr sz="1600" b="0" i="0">
                 <a:solidFill>
                   <a:srgbClr val="333333"/>
                 </a:solidFill>
                 <a:latin typeface="Calibri"/>
               </a:rPr>
-              <a:t>x11, ipv6, alsa, pam</a:t>
+              <a:t>Affects which recipes</a:t>
             </a:r>
           </a:p>
           <a:p>
@@ -6709,13 +8188,13 @@
               </a:spcAft>
             </a:pPr>
             <a:r>
-              <a:rPr sz="1100" b="0" i="0">
+              <a:rPr sz="1600" b="0" i="0">
                 <a:solidFill>
                   <a:srgbClr val="333333"/>
                 </a:solidFill>
                 <a:latin typeface="Calibri"/>
               </a:rPr>
-              <a:t/>
+              <a:t>and PACKAGECONFIG</a:t>
             </a:r>
           </a:p>
           <a:p>
@@ -6725,71 +8204,7 @@
               </a:spcAft>
             </a:pPr>
             <a:r>
-              <a:rPr sz="1100" b="0" i="0">
-                <a:solidFill>
-                  <a:srgbClr val="333333"/>
-                </a:solidFill>
-                <a:latin typeface="Calibri"/>
-              </a:rPr>
-              <a:t>Set in distro conf</a:t>
-            </a:r>
-          </a:p>
-          <a:p>
-            <a:pPr>
-              <a:spcAft>
-                <a:spcPts val="400"/>
-              </a:spcAft>
-            </a:pPr>
-            <a:r>
-              <a:rPr sz="1100" b="0" i="0">
-                <a:solidFill>
-                  <a:srgbClr val="333333"/>
-                </a:solidFill>
-                <a:latin typeface="Calibri"/>
-              </a:rPr>
-              <a:t/>
-            </a:r>
-          </a:p>
-          <a:p>
-            <a:pPr>
-              <a:spcAft>
-                <a:spcPts val="400"/>
-              </a:spcAft>
-            </a:pPr>
-            <a:r>
-              <a:rPr sz="1100" b="0" i="0">
-                <a:solidFill>
-                  <a:srgbClr val="333333"/>
-                </a:solidFill>
-                <a:latin typeface="Calibri"/>
-              </a:rPr>
-              <a:t>Affects which recipes</a:t>
-            </a:r>
-          </a:p>
-          <a:p>
-            <a:pPr>
-              <a:spcAft>
-                <a:spcPts val="400"/>
-              </a:spcAft>
-            </a:pPr>
-            <a:r>
-              <a:rPr sz="1100" b="0" i="0">
-                <a:solidFill>
-                  <a:srgbClr val="333333"/>
-                </a:solidFill>
-                <a:latin typeface="Calibri"/>
-              </a:rPr>
-              <a:t>and PACKAGECONFIG</a:t>
-            </a:r>
-          </a:p>
-          <a:p>
-            <a:pPr>
-              <a:spcAft>
-                <a:spcPts val="400"/>
-              </a:spcAft>
-            </a:pPr>
-            <a:r>
-              <a:rPr sz="1100" b="0" i="0">
+              <a:rPr sz="1600" b="0" i="0">
                 <a:solidFill>
                   <a:srgbClr val="333333"/>
                 </a:solidFill>
@@ -6808,7 +8223,7 @@
         </p:nvSpPr>
         <p:spPr>
           <a:xfrm>
-            <a:off x="4297680" y="1783080"/>
+            <a:off x="4320540" y="1462754"/>
             <a:ext cx="3520440" cy="640080"/>
           </a:xfrm>
           <a:prstGeom prst="rect">
@@ -6837,7 +8252,7 @@
           </a:fontRef>
         </p:style>
         <p:txBody>
-          <a:bodyPr rtlCol="0" anchor="ctr" lIns="182880"/>
+          <a:bodyPr lIns="182880" rtlCol="0" anchor="ctr"/>
           <a:lstStyle/>
           <a:p>
             <a:pPr algn="ctr"/>
@@ -6872,7 +8287,7 @@
         </p:nvSpPr>
         <p:spPr>
           <a:xfrm>
-            <a:off x="4297680" y="2423160"/>
+            <a:off x="4320540" y="2102834"/>
             <a:ext cx="3520440" cy="3840480"/>
           </a:xfrm>
           <a:prstGeom prst="rect">
@@ -6907,6 +8322,7 @@
           <a:lstStyle/>
           <a:p>
             <a:pPr algn="ctr"/>
+            <a:endParaRPr/>
           </a:p>
         </p:txBody>
       </p:sp>
@@ -6918,8 +8334,8 @@
         </p:nvSpPr>
         <p:spPr>
           <a:xfrm>
-            <a:off x="4389120" y="2514600"/>
-            <a:ext cx="3337560" cy="3657600"/>
+            <a:off x="4411980" y="2194274"/>
+            <a:ext cx="3337560" cy="3344505"/>
           </a:xfrm>
           <a:prstGeom prst="rect">
             <a:avLst/>
@@ -6938,7 +8354,7 @@
               </a:spcAft>
             </a:pPr>
             <a:r>
-              <a:rPr sz="1100" b="0" i="0">
+              <a:rPr sz="1600" b="0" i="0">
                 <a:solidFill>
                   <a:srgbClr val="333333"/>
                 </a:solidFill>
@@ -6953,14 +8369,43 @@
                 <a:spcPts val="400"/>
               </a:spcAft>
             </a:pPr>
-            <a:r>
-              <a:rPr sz="1100" b="0" i="0">
+            <a:endParaRPr sz="1600" b="0" i="0">
+              <a:solidFill>
+                <a:srgbClr val="333333"/>
+              </a:solidFill>
+              <a:latin typeface="Calibri"/>
+            </a:endParaRPr>
+          </a:p>
+          <a:p>
+            <a:pPr>
+              <a:spcAft>
+                <a:spcPts val="400"/>
+              </a:spcAft>
+            </a:pPr>
+            <a:r>
+              <a:rPr b="1" i="0">
+                <a:solidFill>
+                  <a:srgbClr val="663399"/>
+                </a:solidFill>
+                <a:latin typeface="Calibri"/>
+              </a:rPr>
+              <a:t>Examples:</a:t>
+            </a:r>
+          </a:p>
+          <a:p>
+            <a:pPr>
+              <a:spcAft>
+                <a:spcPts val="400"/>
+              </a:spcAft>
+            </a:pPr>
+            <a:r>
+              <a:rPr sz="1600" b="0" i="0">
                 <a:solidFill>
                   <a:srgbClr val="333333"/>
                 </a:solidFill>
                 <a:latin typeface="Calibri"/>
               </a:rPr>
-              <a:t/>
+              <a:t>usbhost, ethernet, wifi,</a:t>
             </a:r>
           </a:p>
           <a:p>
@@ -6970,13 +8415,13 @@
               </a:spcAft>
             </a:pPr>
             <a:r>
-              <a:rPr sz="1200" b="1" i="0">
-                <a:solidFill>
-                  <a:srgbClr val="663399"/>
-                </a:solidFill>
-                <a:latin typeface="Calibri"/>
-              </a:rPr>
-              <a:t>Examples:</a:t>
+              <a:rPr sz="1600" b="0" i="0">
+                <a:solidFill>
+                  <a:srgbClr val="333333"/>
+                </a:solidFill>
+                <a:latin typeface="Calibri"/>
+              </a:rPr>
+              <a:t>bluetooth, screen, alsa</a:t>
             </a:r>
           </a:p>
           <a:p>
@@ -6985,14 +8430,27 @@
                 <a:spcPts val="400"/>
               </a:spcAft>
             </a:pPr>
-            <a:r>
-              <a:rPr sz="1100" b="0" i="0">
+            <a:endParaRPr sz="1600" b="0" i="0">
+              <a:solidFill>
+                <a:srgbClr val="333333"/>
+              </a:solidFill>
+              <a:latin typeface="Calibri"/>
+            </a:endParaRPr>
+          </a:p>
+          <a:p>
+            <a:pPr>
+              <a:spcAft>
+                <a:spcPts val="400"/>
+              </a:spcAft>
+            </a:pPr>
+            <a:r>
+              <a:rPr sz="1600" b="0" i="0">
                 <a:solidFill>
                   <a:srgbClr val="333333"/>
                 </a:solidFill>
                 <a:latin typeface="Calibri"/>
               </a:rPr>
-              <a:t>usbhost, ethernet, wifi,</a:t>
+              <a:t>Set in machine conf</a:t>
             </a:r>
           </a:p>
           <a:p>
@@ -7001,14 +8459,27 @@
                 <a:spcPts val="400"/>
               </a:spcAft>
             </a:pPr>
-            <a:r>
-              <a:rPr sz="1100" b="0" i="0">
+            <a:endParaRPr sz="1600" b="0" i="0">
+              <a:solidFill>
+                <a:srgbClr val="333333"/>
+              </a:solidFill>
+              <a:latin typeface="Calibri"/>
+            </a:endParaRPr>
+          </a:p>
+          <a:p>
+            <a:pPr>
+              <a:spcAft>
+                <a:spcPts val="400"/>
+              </a:spcAft>
+            </a:pPr>
+            <a:r>
+              <a:rPr sz="1600" b="0" i="0">
                 <a:solidFill>
                   <a:srgbClr val="333333"/>
                 </a:solidFill>
                 <a:latin typeface="Calibri"/>
               </a:rPr>
-              <a:t>bluetooth, screen, alsa</a:t>
+              <a:t>Affects what packages</a:t>
             </a:r>
           </a:p>
           <a:p>
@@ -7018,13 +8489,13 @@
               </a:spcAft>
             </a:pPr>
             <a:r>
-              <a:rPr sz="1100" b="0" i="0">
+              <a:rPr sz="1600" b="0" i="0">
                 <a:solidFill>
                   <a:srgbClr val="333333"/>
                 </a:solidFill>
                 <a:latin typeface="Calibri"/>
               </a:rPr>
-              <a:t/>
+              <a:t>make sense for this</a:t>
             </a:r>
           </a:p>
           <a:p>
@@ -7034,71 +8505,7 @@
               </a:spcAft>
             </a:pPr>
             <a:r>
-              <a:rPr sz="1100" b="0" i="0">
-                <a:solidFill>
-                  <a:srgbClr val="333333"/>
-                </a:solidFill>
-                <a:latin typeface="Calibri"/>
-              </a:rPr>
-              <a:t>Set in machine conf</a:t>
-            </a:r>
-          </a:p>
-          <a:p>
-            <a:pPr>
-              <a:spcAft>
-                <a:spcPts val="400"/>
-              </a:spcAft>
-            </a:pPr>
-            <a:r>
-              <a:rPr sz="1100" b="0" i="0">
-                <a:solidFill>
-                  <a:srgbClr val="333333"/>
-                </a:solidFill>
-                <a:latin typeface="Calibri"/>
-              </a:rPr>
-              <a:t/>
-            </a:r>
-          </a:p>
-          <a:p>
-            <a:pPr>
-              <a:spcAft>
-                <a:spcPts val="400"/>
-              </a:spcAft>
-            </a:pPr>
-            <a:r>
-              <a:rPr sz="1100" b="0" i="0">
-                <a:solidFill>
-                  <a:srgbClr val="333333"/>
-                </a:solidFill>
-                <a:latin typeface="Calibri"/>
-              </a:rPr>
-              <a:t>Affects what packages</a:t>
-            </a:r>
-          </a:p>
-          <a:p>
-            <a:pPr>
-              <a:spcAft>
-                <a:spcPts val="400"/>
-              </a:spcAft>
-            </a:pPr>
-            <a:r>
-              <a:rPr sz="1100" b="0" i="0">
-                <a:solidFill>
-                  <a:srgbClr val="333333"/>
-                </a:solidFill>
-                <a:latin typeface="Calibri"/>
-              </a:rPr>
-              <a:t>make sense for this</a:t>
-            </a:r>
-          </a:p>
-          <a:p>
-            <a:pPr>
-              <a:spcAft>
-                <a:spcPts val="400"/>
-              </a:spcAft>
-            </a:pPr>
-            <a:r>
-              <a:rPr sz="1100" b="0" i="0">
+              <a:rPr sz="1600" b="0" i="0">
                 <a:solidFill>
                   <a:srgbClr val="333333"/>
                 </a:solidFill>
@@ -7117,7 +8524,7 @@
         </p:nvSpPr>
         <p:spPr>
           <a:xfrm>
-            <a:off x="7955279" y="1783080"/>
+            <a:off x="7978139" y="1462754"/>
             <a:ext cx="3520440" cy="640080"/>
           </a:xfrm>
           <a:prstGeom prst="rect">
@@ -7146,7 +8553,7 @@
           </a:fontRef>
         </p:style>
         <p:txBody>
-          <a:bodyPr rtlCol="0" anchor="ctr" lIns="182880"/>
+          <a:bodyPr lIns="182880" rtlCol="0" anchor="ctr"/>
           <a:lstStyle/>
           <a:p>
             <a:pPr algn="ctr"/>
@@ -7181,7 +8588,7 @@
         </p:nvSpPr>
         <p:spPr>
           <a:xfrm>
-            <a:off x="7955279" y="2423160"/>
+            <a:off x="7978139" y="2102834"/>
             <a:ext cx="3520440" cy="3840480"/>
           </a:xfrm>
           <a:prstGeom prst="rect">
@@ -7216,6 +8623,7 @@
           <a:lstStyle/>
           <a:p>
             <a:pPr algn="ctr"/>
+            <a:endParaRPr/>
           </a:p>
         </p:txBody>
       </p:sp>
@@ -7227,8 +8635,8 @@
         </p:nvSpPr>
         <p:spPr>
           <a:xfrm>
-            <a:off x="8046719" y="2514600"/>
-            <a:ext cx="3337560" cy="3657600"/>
+            <a:off x="8069579" y="2194274"/>
+            <a:ext cx="3337560" cy="3344505"/>
           </a:xfrm>
           <a:prstGeom prst="rect">
             <a:avLst/>
@@ -7247,7 +8655,7 @@
               </a:spcAft>
             </a:pPr>
             <a:r>
-              <a:rPr sz="1100" b="0" i="0">
+              <a:rPr sz="1600" b="0" i="0">
                 <a:solidFill>
                   <a:srgbClr val="333333"/>
                 </a:solidFill>
@@ -7262,14 +8670,43 @@
                 <a:spcPts val="400"/>
               </a:spcAft>
             </a:pPr>
-            <a:r>
-              <a:rPr sz="1100" b="0" i="0">
+            <a:endParaRPr sz="1600" b="0" i="0">
+              <a:solidFill>
+                <a:srgbClr val="333333"/>
+              </a:solidFill>
+              <a:latin typeface="Calibri"/>
+            </a:endParaRPr>
+          </a:p>
+          <a:p>
+            <a:pPr>
+              <a:spcAft>
+                <a:spcPts val="400"/>
+              </a:spcAft>
+            </a:pPr>
+            <a:r>
+              <a:rPr b="1" i="0">
+                <a:solidFill>
+                  <a:srgbClr val="CC0066"/>
+                </a:solidFill>
+                <a:latin typeface="Calibri"/>
+              </a:rPr>
+              <a:t>Examples:</a:t>
+            </a:r>
+          </a:p>
+          <a:p>
+            <a:pPr>
+              <a:spcAft>
+                <a:spcPts val="400"/>
+              </a:spcAft>
+            </a:pPr>
+            <a:r>
+              <a:rPr sz="1600" b="0" i="0">
                 <a:solidFill>
                   <a:srgbClr val="333333"/>
                 </a:solidFill>
                 <a:latin typeface="Calibri"/>
               </a:rPr>
-              <a:t/>
+              <a:t>debug-tweaks, tools-debug,</a:t>
             </a:r>
           </a:p>
           <a:p>
@@ -7279,13 +8716,13 @@
               </a:spcAft>
             </a:pPr>
             <a:r>
-              <a:rPr sz="1200" b="1" i="0">
-                <a:solidFill>
-                  <a:srgbClr val="CC0066"/>
-                </a:solidFill>
-                <a:latin typeface="Calibri"/>
-              </a:rPr>
-              <a:t>Examples:</a:t>
+              <a:rPr sz="1600" b="0" i="0">
+                <a:solidFill>
+                  <a:srgbClr val="333333"/>
+                </a:solidFill>
+                <a:latin typeface="Calibri"/>
+              </a:rPr>
+              <a:t>ssh-server-openssh,</a:t>
             </a:r>
           </a:p>
           <a:p>
@@ -7295,13 +8732,13 @@
               </a:spcAft>
             </a:pPr>
             <a:r>
-              <a:rPr sz="1100" b="0" i="0">
+              <a:rPr sz="1600" b="0" i="0">
                 <a:solidFill>
                   <a:srgbClr val="333333"/>
                 </a:solidFill>
                 <a:latin typeface="Calibri"/>
               </a:rPr>
-              <a:t>debug-tweaks, tools-debug,</a:t>
+              <a:t>package-management</a:t>
             </a:r>
           </a:p>
           <a:p>
@@ -7310,14 +8747,27 @@
                 <a:spcPts val="400"/>
               </a:spcAft>
             </a:pPr>
-            <a:r>
-              <a:rPr sz="1100" b="0" i="0">
+            <a:endParaRPr sz="1600" b="0" i="0">
+              <a:solidFill>
+                <a:srgbClr val="333333"/>
+              </a:solidFill>
+              <a:latin typeface="Calibri"/>
+            </a:endParaRPr>
+          </a:p>
+          <a:p>
+            <a:pPr>
+              <a:spcAft>
+                <a:spcPts val="400"/>
+              </a:spcAft>
+            </a:pPr>
+            <a:r>
+              <a:rPr sz="1600" b="0" i="0">
                 <a:solidFill>
                   <a:srgbClr val="333333"/>
                 </a:solidFill>
                 <a:latin typeface="Calibri"/>
               </a:rPr>
-              <a:t>ssh-server-openssh,</a:t>
+              <a:t>Set in image recipe or</a:t>
             </a:r>
           </a:p>
           <a:p>
@@ -7327,13 +8777,13 @@
               </a:spcAft>
             </a:pPr>
             <a:r>
-              <a:rPr sz="1100" b="0" i="0">
+              <a:rPr sz="1600" b="0" i="0">
                 <a:solidFill>
                   <a:srgbClr val="333333"/>
                 </a:solidFill>
                 <a:latin typeface="Calibri"/>
               </a:rPr>
-              <a:t>package-management</a:t>
+              <a:t>local.conf</a:t>
             </a:r>
           </a:p>
           <a:p>
@@ -7342,15 +8792,12 @@
                 <a:spcPts val="400"/>
               </a:spcAft>
             </a:pPr>
-            <a:r>
-              <a:rPr sz="1100" b="0" i="0">
-                <a:solidFill>
-                  <a:srgbClr val="333333"/>
-                </a:solidFill>
-                <a:latin typeface="Calibri"/>
-              </a:rPr>
-              <a:t/>
-            </a:r>
+            <a:endParaRPr sz="1600" b="0" i="0">
+              <a:solidFill>
+                <a:srgbClr val="333333"/>
+              </a:solidFill>
+              <a:latin typeface="Calibri"/>
+            </a:endParaRPr>
           </a:p>
           <a:p>
             <a:pPr>
@@ -7359,55 +8806,7 @@
               </a:spcAft>
             </a:pPr>
             <a:r>
-              <a:rPr sz="1100" b="0" i="0">
-                <a:solidFill>
-                  <a:srgbClr val="333333"/>
-                </a:solidFill>
-                <a:latin typeface="Calibri"/>
-              </a:rPr>
-              <a:t>Set in image recipe or</a:t>
-            </a:r>
-          </a:p>
-          <a:p>
-            <a:pPr>
-              <a:spcAft>
-                <a:spcPts val="400"/>
-              </a:spcAft>
-            </a:pPr>
-            <a:r>
-              <a:rPr sz="1100" b="0" i="0">
-                <a:solidFill>
-                  <a:srgbClr val="333333"/>
-                </a:solidFill>
-                <a:latin typeface="Calibri"/>
-              </a:rPr>
-              <a:t>local.conf</a:t>
-            </a:r>
-          </a:p>
-          <a:p>
-            <a:pPr>
-              <a:spcAft>
-                <a:spcPts val="400"/>
-              </a:spcAft>
-            </a:pPr>
-            <a:r>
-              <a:rPr sz="1100" b="0" i="0">
-                <a:solidFill>
-                  <a:srgbClr val="333333"/>
-                </a:solidFill>
-                <a:latin typeface="Calibri"/>
-              </a:rPr>
-              <a:t/>
-            </a:r>
-          </a:p>
-          <a:p>
-            <a:pPr>
-              <a:spcAft>
-                <a:spcPts val="400"/>
-              </a:spcAft>
-            </a:pPr>
-            <a:r>
-              <a:rPr sz="1100" b="0" i="0">
+              <a:rPr sz="1600" b="0" i="0">
                 <a:solidFill>
                   <a:srgbClr val="333333"/>
                 </a:solidFill>
@@ -7426,7 +8825,7 @@
         </p:nvSpPr>
         <p:spPr>
           <a:xfrm>
-            <a:off x="822960" y="6355080"/>
+            <a:off x="662940" y="5962701"/>
             <a:ext cx="10515600" cy="365760"/>
           </a:xfrm>
           <a:prstGeom prst="roundRect">
@@ -7455,12 +8854,12 @@
           </a:fontRef>
         </p:style>
         <p:txBody>
-          <a:bodyPr rtlCol="0" anchor="ctr" lIns="228600" rIns="228600" wrap="square"/>
+          <a:bodyPr wrap="square" lIns="228600" rIns="228600" rtlCol="0" anchor="ctr"/>
           <a:lstStyle/>
           <a:p>
             <a:pPr algn="l"/>
             <a:r>
-              <a:rPr sz="1200" b="1">
+              <a:rPr sz="1200" b="1" dirty="0">
                 <a:solidFill>
                   <a:srgbClr val="663399"/>
                 </a:solidFill>
@@ -7479,8 +8878,8 @@
 </p:sld>
 </file>
 
-<file path=ppt/slides/slide14.xml><?xml version="1.0" encoding="utf-8"?>
-<p:sld xmlns:a="http://schemas.openxmlformats.org/drawingml/2006/main" xmlns:p="http://schemas.openxmlformats.org/presentationml/2006/main" xmlns:r="http://schemas.openxmlformats.org/officeDocument/2006/relationships">
+<file path=ppt/slides/slide8.xml><?xml version="1.0" encoding="utf-8"?>
+<p:sld xmlns:a="http://schemas.openxmlformats.org/drawingml/2006/main" xmlns:r="http://schemas.openxmlformats.org/officeDocument/2006/relationships" xmlns:p="http://schemas.openxmlformats.org/presentationml/2006/main">
   <p:cSld>
     <p:spTree>
       <p:nvGrpSpPr>
@@ -7488,7 +8887,14 @@
         <p:cNvGrpSpPr/>
         <p:nvPr/>
       </p:nvGrpSpPr>
-      <p:grpSpPr/>
+      <p:grpSpPr>
+        <a:xfrm>
+          <a:off x="0" y="0"/>
+          <a:ext cx="0" cy="0"/>
+          <a:chOff x="0" y="0"/>
+          <a:chExt cx="0" cy="0"/>
+        </a:xfrm>
+      </p:grpSpPr>
       <p:sp>
         <p:nvSpPr>
           <p:cNvPr id="2" name="Title 1"/>
@@ -7505,10 +8911,7 @@
           <a:lstStyle/>
           <a:p>
             <a:r>
-              <a:rPr sz="3200" b="1">
-                <a:solidFill>
-                  <a:srgbClr val="663399"/>
-                </a:solidFill>
+              <a:rPr sz="3200" b="1" dirty="0">
                 <a:latin typeface="Calibri"/>
               </a:rPr>
               <a:t>Session Summary</a:t>
@@ -7533,7 +8936,7 @@
           <a:noFill/>
         </p:spPr>
         <p:txBody>
-          <a:bodyPr wrap="square" anchor="t" lIns="45720" rIns="45720">
+          <a:bodyPr wrap="square" lIns="45720" rIns="45720" anchor="t">
             <a:spAutoFit/>
           </a:bodyPr>
           <a:lstStyle/>
@@ -7588,7 +8991,7 @@
           </a:fontRef>
         </p:style>
         <p:txBody>
-          <a:bodyPr rtlCol="0" anchor="ctr" lIns="0" rIns="0"/>
+          <a:bodyPr lIns="0" rIns="0" rtlCol="0" anchor="ctr"/>
           <a:lstStyle/>
           <a:p>
             <a:pPr algn="ctr"/>
@@ -7621,7 +9024,7 @@
           <a:noFill/>
         </p:spPr>
         <p:txBody>
-          <a:bodyPr wrap="square" anchor="t" lIns="45720" rIns="45720">
+          <a:bodyPr wrap="square" lIns="45720" rIns="45720" anchor="t">
             <a:spAutoFit/>
           </a:bodyPr>
           <a:lstStyle/>
@@ -7656,7 +9059,7 @@
           <a:noFill/>
         </p:spPr>
         <p:txBody>
-          <a:bodyPr wrap="square" anchor="t" lIns="45720" rIns="45720">
+          <a:bodyPr wrap="square" lIns="45720" rIns="45720" anchor="t">
             <a:spAutoFit/>
           </a:bodyPr>
           <a:lstStyle/>
@@ -7711,7 +9114,7 @@
           </a:fontRef>
         </p:style>
         <p:txBody>
-          <a:bodyPr rtlCol="0" anchor="ctr" lIns="0" rIns="0"/>
+          <a:bodyPr lIns="0" rIns="0" rtlCol="0" anchor="ctr"/>
           <a:lstStyle/>
           <a:p>
             <a:pPr algn="ctr"/>
@@ -7744,7 +9147,7 @@
           <a:noFill/>
         </p:spPr>
         <p:txBody>
-          <a:bodyPr wrap="square" anchor="t" lIns="45720" rIns="45720">
+          <a:bodyPr wrap="square" lIns="45720" rIns="45720" anchor="t">
             <a:spAutoFit/>
           </a:bodyPr>
           <a:lstStyle/>
@@ -7779,7 +9182,7 @@
           <a:noFill/>
         </p:spPr>
         <p:txBody>
-          <a:bodyPr wrap="square" anchor="t" lIns="45720" rIns="45720">
+          <a:bodyPr wrap="square" lIns="45720" rIns="45720" anchor="t">
             <a:spAutoFit/>
           </a:bodyPr>
           <a:lstStyle/>
@@ -7834,7 +9237,7 @@
           </a:fontRef>
         </p:style>
         <p:txBody>
-          <a:bodyPr rtlCol="0" anchor="ctr" lIns="0" rIns="0"/>
+          <a:bodyPr lIns="0" rIns="0" rtlCol="0" anchor="ctr"/>
           <a:lstStyle/>
           <a:p>
             <a:pPr algn="ctr"/>
@@ -7867,7 +9270,7 @@
           <a:noFill/>
         </p:spPr>
         <p:txBody>
-          <a:bodyPr wrap="square" anchor="t" lIns="45720" rIns="45720">
+          <a:bodyPr wrap="square" lIns="45720" rIns="45720" anchor="t">
             <a:spAutoFit/>
           </a:bodyPr>
           <a:lstStyle/>
@@ -7902,7 +9305,7 @@
           <a:noFill/>
         </p:spPr>
         <p:txBody>
-          <a:bodyPr wrap="square" anchor="t" lIns="45720" rIns="45720">
+          <a:bodyPr wrap="square" lIns="45720" rIns="45720" anchor="t">
             <a:spAutoFit/>
           </a:bodyPr>
           <a:lstStyle/>
@@ -7957,7 +9360,7 @@
           </a:fontRef>
         </p:style>
         <p:txBody>
-          <a:bodyPr rtlCol="0" anchor="ctr" lIns="0" rIns="0"/>
+          <a:bodyPr lIns="0" rIns="0" rtlCol="0" anchor="ctr"/>
           <a:lstStyle/>
           <a:p>
             <a:pPr algn="ctr"/>
@@ -7990,7 +9393,7 @@
           <a:noFill/>
         </p:spPr>
         <p:txBody>
-          <a:bodyPr wrap="square" anchor="t" lIns="45720" rIns="45720">
+          <a:bodyPr wrap="square" lIns="45720" rIns="45720" anchor="t">
             <a:spAutoFit/>
           </a:bodyPr>
           <a:lstStyle/>
@@ -8025,7 +9428,7 @@
           <a:noFill/>
         </p:spPr>
         <p:txBody>
-          <a:bodyPr wrap="square" anchor="t" lIns="45720" rIns="45720">
+          <a:bodyPr wrap="square" lIns="45720" rIns="45720" anchor="t">
             <a:spAutoFit/>
           </a:bodyPr>
           <a:lstStyle/>
@@ -8080,7 +9483,7 @@
           </a:fontRef>
         </p:style>
         <p:txBody>
-          <a:bodyPr rtlCol="0" anchor="ctr" lIns="0" rIns="0"/>
+          <a:bodyPr lIns="0" rIns="0" rtlCol="0" anchor="ctr"/>
           <a:lstStyle/>
           <a:p>
             <a:pPr algn="ctr"/>
@@ -8113,7 +9516,7 @@
           <a:noFill/>
         </p:spPr>
         <p:txBody>
-          <a:bodyPr wrap="square" anchor="t" lIns="45720" rIns="45720">
+          <a:bodyPr wrap="square" lIns="45720" rIns="45720" anchor="t">
             <a:spAutoFit/>
           </a:bodyPr>
           <a:lstStyle/>
@@ -8148,7 +9551,7 @@
           <a:noFill/>
         </p:spPr>
         <p:txBody>
-          <a:bodyPr wrap="square" anchor="t" lIns="45720" rIns="45720">
+          <a:bodyPr wrap="square" lIns="45720" rIns="45720" anchor="t">
             <a:spAutoFit/>
           </a:bodyPr>
           <a:lstStyle/>
@@ -8203,12 +9606,12 @@
           </a:fontRef>
         </p:style>
         <p:txBody>
-          <a:bodyPr rtlCol="0" anchor="ctr" lIns="228600"/>
+          <a:bodyPr lIns="228600" rtlCol="0" anchor="ctr"/>
           <a:lstStyle/>
           <a:p>
             <a:pPr algn="ctr"/>
             <a:r>
-              <a:rPr sz="1400" b="1">
+              <a:rPr sz="1400" b="1" dirty="0">
                 <a:solidFill>
                   <a:srgbClr val="663399"/>
                 </a:solidFill>
@@ -8217,1224 +9620,13 @@
               <a:t>Next session  →  </a:t>
             </a:r>
             <a:r>
-              <a:rPr sz="1400">
+              <a:rPr sz="1400" dirty="0">
                 <a:solidFill>
                   <a:srgbClr val="333333"/>
                 </a:solidFill>
                 <a:latin typeface="Calibri"/>
               </a:rPr>
-              <a:t>BSP and Kernel — Hardware enablement (75 min)</a:t>
-            </a:r>
-          </a:p>
-        </p:txBody>
-      </p:sp>
-    </p:spTree>
-  </p:cSld>
-  <p:clrMapOvr>
-    <a:masterClrMapping/>
-  </p:clrMapOvr>
-</p:sld>
-</file>
-
-<file path=ppt/slides/slide7.xml><?xml version="1.0" encoding="utf-8"?>
-<p:sld xmlns:a="http://schemas.openxmlformats.org/drawingml/2006/main" xmlns:p="http://schemas.openxmlformats.org/presentationml/2006/main" xmlns:r="http://schemas.openxmlformats.org/officeDocument/2006/relationships">
-  <p:cSld>
-    <p:spTree>
-      <p:nvGrpSpPr>
-        <p:cNvPr id="1" name=""/>
-        <p:cNvGrpSpPr/>
-        <p:nvPr/>
-      </p:nvGrpSpPr>
-      <p:grpSpPr/>
-      <p:sp>
-        <p:nvSpPr>
-          <p:cNvPr id="2" name="Title 1"/>
-          <p:cNvSpPr>
-            <a:spLocks noGrp="1"/>
-          </p:cNvSpPr>
-          <p:nvPr>
-            <p:ph type="ctrTitle"/>
-          </p:nvPr>
-        </p:nvSpPr>
-        <p:spPr/>
-        <p:txBody>
-          <a:bodyPr/>
-          <a:lstStyle/>
-          <a:p>
-            <a:r>
-              <a:rPr sz="4400" b="1">
-                <a:solidFill>
-                  <a:srgbClr val="FFFFFF"/>
-                </a:solidFill>
-                <a:latin typeface="Calibri"/>
-              </a:rPr>
-              <a:t>Recipes — Part 2</a:t>
-            </a:r>
-          </a:p>
-        </p:txBody>
-      </p:sp>
-      <p:sp>
-        <p:nvSpPr>
-          <p:cNvPr id="3" name="Subtitle 2"/>
-          <p:cNvSpPr>
-            <a:spLocks noGrp="1"/>
-          </p:cNvSpPr>
-          <p:nvPr>
-            <p:ph type="subTitle" idx="1"/>
-          </p:nvPr>
-        </p:nvSpPr>
-        <p:spPr/>
-        <p:txBody>
-          <a:bodyPr/>
-          <a:lstStyle/>
-          <a:p>
-            <a:r>
-              <a:rPr sz="2200" i="1">
-                <a:solidFill>
-                  <a:srgbClr val="FFFFFF"/>
-                </a:solidFill>
-                <a:latin typeface="Calibri"/>
-              </a:rPr>
-              <a:t>Day 2 • Session 3 • 60 minutes</a:t>
-            </a:r>
-          </a:p>
-          <a:p>
-            <a:r>
-              <a:rPr sz="1800">
-                <a:solidFill>
-                  <a:srgbClr val="FFFFFF"/>
-                </a:solidFill>
-                <a:latin typeface="Calibri"/>
-              </a:rPr>
-              <a:t>Packaging and image composition</a:t>
-            </a:r>
-          </a:p>
-        </p:txBody>
-      </p:sp>
-    </p:spTree>
-  </p:cSld>
-  <p:clrMapOvr>
-    <a:masterClrMapping/>
-  </p:clrMapOvr>
-</p:sld>
-</file>
-
-<file path=ppt/slides/slide8.xml><?xml version="1.0" encoding="utf-8"?>
-<p:sld xmlns:a="http://schemas.openxmlformats.org/drawingml/2006/main" xmlns:p="http://schemas.openxmlformats.org/presentationml/2006/main" xmlns:r="http://schemas.openxmlformats.org/officeDocument/2006/relationships">
-  <p:cSld>
-    <p:spTree>
-      <p:nvGrpSpPr>
-        <p:cNvPr id="1" name=""/>
-        <p:cNvGrpSpPr/>
-        <p:nvPr/>
-      </p:nvGrpSpPr>
-      <p:grpSpPr/>
-      <p:sp>
-        <p:nvSpPr>
-          <p:cNvPr id="2" name="Title 1"/>
-          <p:cNvSpPr>
-            <a:spLocks noGrp="1"/>
-          </p:cNvSpPr>
-          <p:nvPr>
-            <p:ph type="title"/>
-          </p:nvPr>
-        </p:nvSpPr>
-        <p:spPr/>
-        <p:txBody>
-          <a:bodyPr/>
-          <a:lstStyle/>
-          <a:p>
-            <a:r>
-              <a:rPr sz="3200" b="1">
-                <a:solidFill>
-                  <a:srgbClr val="CC0066"/>
-                </a:solidFill>
-                <a:latin typeface="Calibri"/>
-              </a:rPr>
-              <a:t>Session Agenda</a:t>
-            </a:r>
-          </a:p>
-        </p:txBody>
-      </p:sp>
-      <p:sp>
-        <p:nvSpPr>
-          <p:cNvPr id="3" name="TextBox 2"/>
-          <p:cNvSpPr txBox="1"/>
-          <p:nvPr/>
-        </p:nvSpPr>
-        <p:spPr>
-          <a:xfrm>
-            <a:off x="822960" y="1463040"/>
-            <a:ext cx="10515600" cy="5029200"/>
-          </a:xfrm>
-          <a:prstGeom prst="rect">
-            <a:avLst/>
-          </a:prstGeom>
-          <a:noFill/>
-        </p:spPr>
-        <p:txBody>
-          <a:bodyPr wrap="square" lIns="45720" rIns="45720">
-            <a:spAutoFit/>
-          </a:bodyPr>
-          <a:lstStyle/>
-          <a:p>
-            <a:pPr>
-              <a:spcAft>
-                <a:spcPts val="600"/>
-              </a:spcAft>
-            </a:pPr>
-            <a:r>
-              <a:rPr sz="2000" b="0" i="0">
-                <a:solidFill>
-                  <a:srgbClr val="333333"/>
-                </a:solidFill>
-                <a:latin typeface="Calibri"/>
-              </a:rPr>
-              <a:t>1.  Packaging models — rpm, deb, ipk</a:t>
-            </a:r>
-          </a:p>
-          <a:p>
-            <a:pPr>
-              <a:spcAft>
-                <a:spcPts val="600"/>
-              </a:spcAft>
-            </a:pPr>
-            <a:r>
-              <a:rPr sz="2000" b="0" i="0">
-                <a:solidFill>
-                  <a:srgbClr val="333333"/>
-                </a:solidFill>
-                <a:latin typeface="Calibri"/>
-              </a:rPr>
-              <a:t>2.  Selection criteria for embedded products</a:t>
-            </a:r>
-          </a:p>
-          <a:p>
-            <a:pPr>
-              <a:spcAft>
-                <a:spcPts val="600"/>
-              </a:spcAft>
-            </a:pPr>
-            <a:r>
-              <a:rPr sz="2000" b="0" i="0">
-                <a:solidFill>
-                  <a:srgbClr val="333333"/>
-                </a:solidFill>
-                <a:latin typeface="Calibri"/>
-              </a:rPr>
-              <a:t>3.  IMAGE_FEATURES — what they actually do</a:t>
-            </a:r>
-          </a:p>
-          <a:p>
-            <a:pPr>
-              <a:spcAft>
-                <a:spcPts val="600"/>
-              </a:spcAft>
-            </a:pPr>
-            <a:r>
-              <a:rPr sz="2000" b="0" i="0">
-                <a:solidFill>
-                  <a:srgbClr val="333333"/>
-                </a:solidFill>
-                <a:latin typeface="Calibri"/>
-              </a:rPr>
-              <a:t>4.  Packagegroups — bundling related software</a:t>
-            </a:r>
-          </a:p>
-          <a:p>
-            <a:pPr>
-              <a:spcAft>
-                <a:spcPts val="600"/>
-              </a:spcAft>
-            </a:pPr>
-            <a:r>
-              <a:rPr sz="2000" b="0" i="0">
-                <a:solidFill>
-                  <a:srgbClr val="333333"/>
-                </a:solidFill>
-                <a:latin typeface="Calibri"/>
-              </a:rPr>
-              <a:t>5.  IMAGE_INSTALL patterns</a:t>
-            </a:r>
-          </a:p>
-          <a:p>
-            <a:pPr>
-              <a:spcAft>
-                <a:spcPts val="600"/>
-              </a:spcAft>
-            </a:pPr>
-            <a:r>
-              <a:rPr sz="2000" b="0" i="0">
-                <a:solidFill>
-                  <a:srgbClr val="333333"/>
-                </a:solidFill>
-                <a:latin typeface="Calibri"/>
-              </a:rPr>
-              <a:t>6.  Distro features vs machine features vs image features</a:t>
-            </a:r>
-          </a:p>
-        </p:txBody>
-      </p:sp>
-    </p:spTree>
-  </p:cSld>
-  <p:clrMapOvr>
-    <a:masterClrMapping/>
-  </p:clrMapOvr>
-</p:sld>
-</file>
-
-<file path=ppt/slides/slide9.xml><?xml version="1.0" encoding="utf-8"?>
-<p:sld xmlns:a="http://schemas.openxmlformats.org/drawingml/2006/main" xmlns:p="http://schemas.openxmlformats.org/presentationml/2006/main" xmlns:r="http://schemas.openxmlformats.org/officeDocument/2006/relationships">
-  <p:cSld>
-    <p:spTree>
-      <p:nvGrpSpPr>
-        <p:cNvPr id="1" name=""/>
-        <p:cNvGrpSpPr/>
-        <p:nvPr/>
-      </p:nvGrpSpPr>
-      <p:grpSpPr/>
-      <p:sp>
-        <p:nvSpPr>
-          <p:cNvPr id="2" name="Title 1"/>
-          <p:cNvSpPr>
-            <a:spLocks noGrp="1"/>
-          </p:cNvSpPr>
-          <p:nvPr>
-            <p:ph type="title"/>
-          </p:nvPr>
-        </p:nvSpPr>
-        <p:spPr/>
-        <p:txBody>
-          <a:bodyPr/>
-          <a:lstStyle/>
-          <a:p>
-            <a:r>
-              <a:rPr sz="3200" b="1">
-                <a:solidFill>
-                  <a:srgbClr val="CC0066"/>
-                </a:solidFill>
-                <a:latin typeface="Calibri"/>
-              </a:rPr>
-              <a:t>Three Packaging Models</a:t>
-            </a:r>
-          </a:p>
-        </p:txBody>
-      </p:sp>
-      <p:sp>
-        <p:nvSpPr>
-          <p:cNvPr id="3" name="TextBox 2"/>
-          <p:cNvSpPr txBox="1"/>
-          <p:nvPr/>
-        </p:nvSpPr>
-        <p:spPr>
-          <a:xfrm>
-            <a:off x="822960" y="1417320"/>
-            <a:ext cx="10515600" cy="365760"/>
-          </a:xfrm>
-          <a:prstGeom prst="rect">
-            <a:avLst/>
-          </a:prstGeom>
-          <a:noFill/>
-        </p:spPr>
-        <p:txBody>
-          <a:bodyPr wrap="square" anchor="t" lIns="45720" rIns="45720">
-            <a:spAutoFit/>
-          </a:bodyPr>
-          <a:lstStyle/>
-          <a:p>
-            <a:pPr algn="l"/>
-            <a:r>
-              <a:rPr sz="1500" b="0" i="1">
-                <a:solidFill>
-                  <a:srgbClr val="666666"/>
-                </a:solidFill>
-                <a:latin typeface="Calibri"/>
-              </a:rPr>
-              <a:t>Yocto can produce any of three package formats. Pick one.</a:t>
-            </a:r>
-          </a:p>
-        </p:txBody>
-      </p:sp>
-      <p:sp>
-        <p:nvSpPr>
-          <p:cNvPr id="4" name="Rectangle 3"/>
-          <p:cNvSpPr/>
-          <p:nvPr/>
-        </p:nvSpPr>
-        <p:spPr>
-          <a:xfrm>
-            <a:off x="640080" y="1783080"/>
-            <a:ext cx="3520440" cy="640080"/>
-          </a:xfrm>
-          <a:prstGeom prst="rect">
-            <a:avLst/>
-          </a:prstGeom>
-          <a:solidFill>
-            <a:srgbClr val="CC0066"/>
-          </a:solidFill>
-          <a:ln>
-            <a:noFill/>
-          </a:ln>
-          <a:effectLst/>
-        </p:spPr>
-        <p:style>
-          <a:lnRef idx="1">
-            <a:schemeClr val="accent1"/>
-          </a:lnRef>
-          <a:fillRef idx="3">
-            <a:schemeClr val="accent1"/>
-          </a:fillRef>
-          <a:effectRef idx="2">
-            <a:schemeClr val="accent1"/>
-          </a:effectRef>
-          <a:fontRef idx="minor">
-            <a:schemeClr val="lt1"/>
-          </a:fontRef>
-        </p:style>
-        <p:txBody>
-          <a:bodyPr rtlCol="0" anchor="ctr" lIns="182880"/>
-          <a:lstStyle/>
-          <a:p>
-            <a:pPr algn="ctr"/>
-            <a:r>
-              <a:rPr sz="2000" b="1">
-                <a:solidFill>
-                  <a:srgbClr val="FFFFFF"/>
-                </a:solidFill>
-                <a:latin typeface="Calibri"/>
-              </a:rPr>
-              <a:t>ipk</a:t>
-            </a:r>
-          </a:p>
-          <a:p>
-            <a:r>
-              <a:rPr sz="1200" i="1">
-                <a:solidFill>
-                  <a:srgbClr val="FFFFFF"/>
-                </a:solidFill>
-                <a:latin typeface="Calibri"/>
-              </a:rPr>
-              <a:t>Small embedded default</a:t>
-            </a:r>
-          </a:p>
-        </p:txBody>
-      </p:sp>
-      <p:sp>
-        <p:nvSpPr>
-          <p:cNvPr id="5" name="Rectangle 4"/>
-          <p:cNvSpPr/>
-          <p:nvPr/>
-        </p:nvSpPr>
-        <p:spPr>
-          <a:xfrm>
-            <a:off x="640080" y="2423160"/>
-            <a:ext cx="3520440" cy="3657600"/>
-          </a:xfrm>
-          <a:prstGeom prst="rect">
-            <a:avLst/>
-          </a:prstGeom>
-          <a:solidFill>
-            <a:srgbClr val="FAFAFA"/>
-          </a:solidFill>
-          <a:ln w="6350">
-            <a:solidFill>
-              <a:srgbClr val="CC0066"/>
-            </a:solidFill>
-          </a:ln>
-          <a:effectLst/>
-        </p:spPr>
-        <p:style>
-          <a:lnRef idx="1">
-            <a:schemeClr val="accent1"/>
-          </a:lnRef>
-          <a:fillRef idx="3">
-            <a:schemeClr val="accent1"/>
-          </a:fillRef>
-          <a:effectRef idx="2">
-            <a:schemeClr val="accent1"/>
-          </a:effectRef>
-          <a:fontRef idx="minor">
-            <a:schemeClr val="lt1"/>
-          </a:fontRef>
-        </p:style>
-        <p:txBody>
-          <a:bodyPr rtlCol="0" anchor="ctr"/>
-          <a:lstStyle/>
-          <a:p>
-            <a:pPr algn="ctr"/>
-          </a:p>
-        </p:txBody>
-      </p:sp>
-      <p:sp>
-        <p:nvSpPr>
-          <p:cNvPr id="6" name="TextBox 5"/>
-          <p:cNvSpPr txBox="1"/>
-          <p:nvPr/>
-        </p:nvSpPr>
-        <p:spPr>
-          <a:xfrm>
-            <a:off x="731519" y="2514600"/>
-            <a:ext cx="3337560" cy="3474720"/>
-          </a:xfrm>
-          <a:prstGeom prst="rect">
-            <a:avLst/>
-          </a:prstGeom>
-          <a:noFill/>
-        </p:spPr>
-        <p:txBody>
-          <a:bodyPr wrap="square" lIns="45720" rIns="45720">
-            <a:spAutoFit/>
-          </a:bodyPr>
-          <a:lstStyle/>
-          <a:p>
-            <a:pPr>
-              <a:spcAft>
-                <a:spcPts val="400"/>
-              </a:spcAft>
-            </a:pPr>
-            <a:r>
-              <a:rPr sz="1100" b="0" i="0">
-                <a:solidFill>
-                  <a:srgbClr val="333333"/>
-                </a:solidFill>
-                <a:latin typeface="Calibri"/>
-              </a:rPr>
-              <a:t>Origin: OpenWrt</a:t>
-            </a:r>
-          </a:p>
-          <a:p>
-            <a:pPr>
-              <a:spcAft>
-                <a:spcPts val="400"/>
-              </a:spcAft>
-            </a:pPr>
-            <a:r>
-              <a:rPr sz="1100" b="0" i="0">
-                <a:solidFill>
-                  <a:srgbClr val="333333"/>
-                </a:solidFill>
-                <a:latin typeface="Calibri"/>
-              </a:rPr>
-              <a:t/>
-            </a:r>
-          </a:p>
-          <a:p>
-            <a:pPr>
-              <a:spcAft>
-                <a:spcPts val="400"/>
-              </a:spcAft>
-            </a:pPr>
-            <a:r>
-              <a:rPr sz="1200" b="1" i="0">
-                <a:solidFill>
-                  <a:srgbClr val="CC0066"/>
-                </a:solidFill>
-                <a:latin typeface="Calibri"/>
-              </a:rPr>
-              <a:t>Pros:</a:t>
-            </a:r>
-          </a:p>
-          <a:p>
-            <a:pPr>
-              <a:spcAft>
-                <a:spcPts val="400"/>
-              </a:spcAft>
-            </a:pPr>
-            <a:r>
-              <a:rPr sz="1100" b="0" i="0">
-                <a:solidFill>
-                  <a:srgbClr val="333333"/>
-                </a:solidFill>
-                <a:latin typeface="Calibri"/>
-              </a:rPr>
-              <a:t>• Smallest overhead</a:t>
-            </a:r>
-          </a:p>
-          <a:p>
-            <a:pPr>
-              <a:spcAft>
-                <a:spcPts val="400"/>
-              </a:spcAft>
-            </a:pPr>
-            <a:r>
-              <a:rPr sz="1100" b="0" i="0">
-                <a:solidFill>
-                  <a:srgbClr val="333333"/>
-                </a:solidFill>
-                <a:latin typeface="Calibri"/>
-              </a:rPr>
-              <a:t>• Fast on-target install</a:t>
-            </a:r>
-          </a:p>
-          <a:p>
-            <a:pPr>
-              <a:spcAft>
-                <a:spcPts val="400"/>
-              </a:spcAft>
-            </a:pPr>
-            <a:r>
-              <a:rPr sz="1100" b="0" i="0">
-                <a:solidFill>
-                  <a:srgbClr val="333333"/>
-                </a:solidFill>
-                <a:latin typeface="Calibri"/>
-              </a:rPr>
-              <a:t>• Designed for embedded</a:t>
-            </a:r>
-          </a:p>
-          <a:p>
-            <a:pPr>
-              <a:spcAft>
-                <a:spcPts val="400"/>
-              </a:spcAft>
-            </a:pPr>
-            <a:r>
-              <a:rPr sz="1100" b="0" i="0">
-                <a:solidFill>
-                  <a:srgbClr val="333333"/>
-                </a:solidFill>
-                <a:latin typeface="Calibri"/>
-              </a:rPr>
-              <a:t/>
-            </a:r>
-          </a:p>
-          <a:p>
-            <a:pPr>
-              <a:spcAft>
-                <a:spcPts val="400"/>
-              </a:spcAft>
-            </a:pPr>
-            <a:r>
-              <a:rPr sz="1200" b="1" i="0">
-                <a:solidFill>
-                  <a:srgbClr val="CC0066"/>
-                </a:solidFill>
-                <a:latin typeface="Calibri"/>
-              </a:rPr>
-              <a:t>Use when:</a:t>
-            </a:r>
-          </a:p>
-          <a:p>
-            <a:pPr>
-              <a:spcAft>
-                <a:spcPts val="400"/>
-              </a:spcAft>
-            </a:pPr>
-            <a:r>
-              <a:rPr sz="1100" b="0" i="0">
-                <a:solidFill>
-                  <a:srgbClr val="333333"/>
-                </a:solidFill>
-                <a:latin typeface="Calibri"/>
-              </a:rPr>
-              <a:t>Most embedded products, especially when ipk feeds or opkg are involved</a:t>
-            </a:r>
-          </a:p>
-        </p:txBody>
-      </p:sp>
-      <p:sp>
-        <p:nvSpPr>
-          <p:cNvPr id="7" name="Rectangle 6"/>
-          <p:cNvSpPr/>
-          <p:nvPr/>
-        </p:nvSpPr>
-        <p:spPr>
-          <a:xfrm>
-            <a:off x="4297680" y="1783080"/>
-            <a:ext cx="3520440" cy="640080"/>
-          </a:xfrm>
-          <a:prstGeom prst="rect">
-            <a:avLst/>
-          </a:prstGeom>
-          <a:solidFill>
-            <a:srgbClr val="663399"/>
-          </a:solidFill>
-          <a:ln>
-            <a:noFill/>
-          </a:ln>
-          <a:effectLst/>
-        </p:spPr>
-        <p:style>
-          <a:lnRef idx="1">
-            <a:schemeClr val="accent1"/>
-          </a:lnRef>
-          <a:fillRef idx="3">
-            <a:schemeClr val="accent1"/>
-          </a:fillRef>
-          <a:effectRef idx="2">
-            <a:schemeClr val="accent1"/>
-          </a:effectRef>
-          <a:fontRef idx="minor">
-            <a:schemeClr val="lt1"/>
-          </a:fontRef>
-        </p:style>
-        <p:txBody>
-          <a:bodyPr rtlCol="0" anchor="ctr" lIns="182880"/>
-          <a:lstStyle/>
-          <a:p>
-            <a:pPr algn="ctr"/>
-            <a:r>
-              <a:rPr sz="2000" b="1">
-                <a:solidFill>
-                  <a:srgbClr val="FFFFFF"/>
-                </a:solidFill>
-                <a:latin typeface="Calibri"/>
-              </a:rPr>
-              <a:t>deb</a:t>
-            </a:r>
-          </a:p>
-          <a:p>
-            <a:r>
-              <a:rPr sz="1200" i="1">
-                <a:solidFill>
-                  <a:srgbClr val="FFFFFF"/>
-                </a:solidFill>
-                <a:latin typeface="Calibri"/>
-              </a:rPr>
-              <a:t>Debian-derived prod</a:t>
-            </a:r>
-          </a:p>
-        </p:txBody>
-      </p:sp>
-      <p:sp>
-        <p:nvSpPr>
-          <p:cNvPr id="8" name="Rectangle 7"/>
-          <p:cNvSpPr/>
-          <p:nvPr/>
-        </p:nvSpPr>
-        <p:spPr>
-          <a:xfrm>
-            <a:off x="4297680" y="2423160"/>
-            <a:ext cx="3520440" cy="3657600"/>
-          </a:xfrm>
-          <a:prstGeom prst="rect">
-            <a:avLst/>
-          </a:prstGeom>
-          <a:solidFill>
-            <a:srgbClr val="FAFAFA"/>
-          </a:solidFill>
-          <a:ln w="6350">
-            <a:solidFill>
-              <a:srgbClr val="663399"/>
-            </a:solidFill>
-          </a:ln>
-          <a:effectLst/>
-        </p:spPr>
-        <p:style>
-          <a:lnRef idx="1">
-            <a:schemeClr val="accent1"/>
-          </a:lnRef>
-          <a:fillRef idx="3">
-            <a:schemeClr val="accent1"/>
-          </a:fillRef>
-          <a:effectRef idx="2">
-            <a:schemeClr val="accent1"/>
-          </a:effectRef>
-          <a:fontRef idx="minor">
-            <a:schemeClr val="lt1"/>
-          </a:fontRef>
-        </p:style>
-        <p:txBody>
-          <a:bodyPr rtlCol="0" anchor="ctr"/>
-          <a:lstStyle/>
-          <a:p>
-            <a:pPr algn="ctr"/>
-          </a:p>
-        </p:txBody>
-      </p:sp>
-      <p:sp>
-        <p:nvSpPr>
-          <p:cNvPr id="9" name="TextBox 8"/>
-          <p:cNvSpPr txBox="1"/>
-          <p:nvPr/>
-        </p:nvSpPr>
-        <p:spPr>
-          <a:xfrm>
-            <a:off x="4389120" y="2514600"/>
-            <a:ext cx="3337560" cy="3474720"/>
-          </a:xfrm>
-          <a:prstGeom prst="rect">
-            <a:avLst/>
-          </a:prstGeom>
-          <a:noFill/>
-        </p:spPr>
-        <p:txBody>
-          <a:bodyPr wrap="square" lIns="45720" rIns="45720">
-            <a:spAutoFit/>
-          </a:bodyPr>
-          <a:lstStyle/>
-          <a:p>
-            <a:pPr>
-              <a:spcAft>
-                <a:spcPts val="400"/>
-              </a:spcAft>
-            </a:pPr>
-            <a:r>
-              <a:rPr sz="1100" b="0" i="0">
-                <a:solidFill>
-                  <a:srgbClr val="333333"/>
-                </a:solidFill>
-                <a:latin typeface="Calibri"/>
-              </a:rPr>
-              <a:t>Origin: Debian/Ubuntu</a:t>
-            </a:r>
-          </a:p>
-          <a:p>
-            <a:pPr>
-              <a:spcAft>
-                <a:spcPts val="400"/>
-              </a:spcAft>
-            </a:pPr>
-            <a:r>
-              <a:rPr sz="1100" b="0" i="0">
-                <a:solidFill>
-                  <a:srgbClr val="333333"/>
-                </a:solidFill>
-                <a:latin typeface="Calibri"/>
-              </a:rPr>
-              <a:t/>
-            </a:r>
-          </a:p>
-          <a:p>
-            <a:pPr>
-              <a:spcAft>
-                <a:spcPts val="400"/>
-              </a:spcAft>
-            </a:pPr>
-            <a:r>
-              <a:rPr sz="1200" b="1" i="0">
-                <a:solidFill>
-                  <a:srgbClr val="663399"/>
-                </a:solidFill>
-                <a:latin typeface="Calibri"/>
-              </a:rPr>
-              <a:t>Pros:</a:t>
-            </a:r>
-          </a:p>
-          <a:p>
-            <a:pPr>
-              <a:spcAft>
-                <a:spcPts val="400"/>
-              </a:spcAft>
-            </a:pPr>
-            <a:r>
-              <a:rPr sz="1100" b="0" i="0">
-                <a:solidFill>
-                  <a:srgbClr val="333333"/>
-                </a:solidFill>
-                <a:latin typeface="Calibri"/>
-              </a:rPr>
-              <a:t>• Familiar to Debian devs</a:t>
-            </a:r>
-          </a:p>
-          <a:p>
-            <a:pPr>
-              <a:spcAft>
-                <a:spcPts val="400"/>
-              </a:spcAft>
-            </a:pPr>
-            <a:r>
-              <a:rPr sz="1100" b="0" i="0">
-                <a:solidFill>
-                  <a:srgbClr val="333333"/>
-                </a:solidFill>
-                <a:latin typeface="Calibri"/>
-              </a:rPr>
-              <a:t>• Strong dependency support</a:t>
-            </a:r>
-          </a:p>
-          <a:p>
-            <a:pPr>
-              <a:spcAft>
-                <a:spcPts val="400"/>
-              </a:spcAft>
-            </a:pPr>
-            <a:r>
-              <a:rPr sz="1100" b="0" i="0">
-                <a:solidFill>
-                  <a:srgbClr val="333333"/>
-                </a:solidFill>
-                <a:latin typeface="Calibri"/>
-              </a:rPr>
-              <a:t>• Wide tooling</a:t>
-            </a:r>
-          </a:p>
-          <a:p>
-            <a:pPr>
-              <a:spcAft>
-                <a:spcPts val="400"/>
-              </a:spcAft>
-            </a:pPr>
-            <a:r>
-              <a:rPr sz="1100" b="0" i="0">
-                <a:solidFill>
-                  <a:srgbClr val="333333"/>
-                </a:solidFill>
-                <a:latin typeface="Calibri"/>
-              </a:rPr>
-              <a:t/>
-            </a:r>
-          </a:p>
-          <a:p>
-            <a:pPr>
-              <a:spcAft>
-                <a:spcPts val="400"/>
-              </a:spcAft>
-            </a:pPr>
-            <a:r>
-              <a:rPr sz="1200" b="1" i="0">
-                <a:solidFill>
-                  <a:srgbClr val="663399"/>
-                </a:solidFill>
-                <a:latin typeface="Calibri"/>
-              </a:rPr>
-              <a:t>Use when:</a:t>
-            </a:r>
-          </a:p>
-          <a:p>
-            <a:pPr>
-              <a:spcAft>
-                <a:spcPts val="400"/>
-              </a:spcAft>
-            </a:pPr>
-            <a:r>
-              <a:rPr sz="1100" b="0" i="0">
-                <a:solidFill>
-                  <a:srgbClr val="333333"/>
-                </a:solidFill>
-                <a:latin typeface="Calibri"/>
-              </a:rPr>
-              <a:t>Your team comes from Debian/Ubuntu and you want apt-like workflows</a:t>
-            </a:r>
-          </a:p>
-        </p:txBody>
-      </p:sp>
-      <p:sp>
-        <p:nvSpPr>
-          <p:cNvPr id="10" name="Rectangle 9"/>
-          <p:cNvSpPr/>
-          <p:nvPr/>
-        </p:nvSpPr>
-        <p:spPr>
-          <a:xfrm>
-            <a:off x="7955279" y="1783080"/>
-            <a:ext cx="3520440" cy="640080"/>
-          </a:xfrm>
-          <a:prstGeom prst="rect">
-            <a:avLst/>
-          </a:prstGeom>
-          <a:solidFill>
-            <a:srgbClr val="CC0066"/>
-          </a:solidFill>
-          <a:ln>
-            <a:noFill/>
-          </a:ln>
-          <a:effectLst/>
-        </p:spPr>
-        <p:style>
-          <a:lnRef idx="1">
-            <a:schemeClr val="accent1"/>
-          </a:lnRef>
-          <a:fillRef idx="3">
-            <a:schemeClr val="accent1"/>
-          </a:fillRef>
-          <a:effectRef idx="2">
-            <a:schemeClr val="accent1"/>
-          </a:effectRef>
-          <a:fontRef idx="minor">
-            <a:schemeClr val="lt1"/>
-          </a:fontRef>
-        </p:style>
-        <p:txBody>
-          <a:bodyPr rtlCol="0" anchor="ctr" lIns="182880"/>
-          <a:lstStyle/>
-          <a:p>
-            <a:pPr algn="ctr"/>
-            <a:r>
-              <a:rPr sz="2000" b="1">
-                <a:solidFill>
-                  <a:srgbClr val="FFFFFF"/>
-                </a:solidFill>
-                <a:latin typeface="Calibri"/>
-              </a:rPr>
-              <a:t>rpm</a:t>
-            </a:r>
-          </a:p>
-          <a:p>
-            <a:r>
-              <a:rPr sz="1200" i="1">
-                <a:solidFill>
-                  <a:srgbClr val="FFFFFF"/>
-                </a:solidFill>
-                <a:latin typeface="Calibri"/>
-              </a:rPr>
-              <a:t>Large/enterprise</a:t>
-            </a:r>
-          </a:p>
-        </p:txBody>
-      </p:sp>
-      <p:sp>
-        <p:nvSpPr>
-          <p:cNvPr id="11" name="Rectangle 10"/>
-          <p:cNvSpPr/>
-          <p:nvPr/>
-        </p:nvSpPr>
-        <p:spPr>
-          <a:xfrm>
-            <a:off x="7955279" y="2423160"/>
-            <a:ext cx="3520440" cy="3657600"/>
-          </a:xfrm>
-          <a:prstGeom prst="rect">
-            <a:avLst/>
-          </a:prstGeom>
-          <a:solidFill>
-            <a:srgbClr val="FAFAFA"/>
-          </a:solidFill>
-          <a:ln w="6350">
-            <a:solidFill>
-              <a:srgbClr val="CC0066"/>
-            </a:solidFill>
-          </a:ln>
-          <a:effectLst/>
-        </p:spPr>
-        <p:style>
-          <a:lnRef idx="1">
-            <a:schemeClr val="accent1"/>
-          </a:lnRef>
-          <a:fillRef idx="3">
-            <a:schemeClr val="accent1"/>
-          </a:fillRef>
-          <a:effectRef idx="2">
-            <a:schemeClr val="accent1"/>
-          </a:effectRef>
-          <a:fontRef idx="minor">
-            <a:schemeClr val="lt1"/>
-          </a:fontRef>
-        </p:style>
-        <p:txBody>
-          <a:bodyPr rtlCol="0" anchor="ctr"/>
-          <a:lstStyle/>
-          <a:p>
-            <a:pPr algn="ctr"/>
-          </a:p>
-        </p:txBody>
-      </p:sp>
-      <p:sp>
-        <p:nvSpPr>
-          <p:cNvPr id="12" name="TextBox 11"/>
-          <p:cNvSpPr txBox="1"/>
-          <p:nvPr/>
-        </p:nvSpPr>
-        <p:spPr>
-          <a:xfrm>
-            <a:off x="8046719" y="2514600"/>
-            <a:ext cx="3337560" cy="3474720"/>
-          </a:xfrm>
-          <a:prstGeom prst="rect">
-            <a:avLst/>
-          </a:prstGeom>
-          <a:noFill/>
-        </p:spPr>
-        <p:txBody>
-          <a:bodyPr wrap="square" lIns="45720" rIns="45720">
-            <a:spAutoFit/>
-          </a:bodyPr>
-          <a:lstStyle/>
-          <a:p>
-            <a:pPr>
-              <a:spcAft>
-                <a:spcPts val="400"/>
-              </a:spcAft>
-            </a:pPr>
-            <a:r>
-              <a:rPr sz="1100" b="0" i="0">
-                <a:solidFill>
-                  <a:srgbClr val="333333"/>
-                </a:solidFill>
-                <a:latin typeface="Calibri"/>
-              </a:rPr>
-              <a:t>Origin: Red Hat</a:t>
-            </a:r>
-          </a:p>
-          <a:p>
-            <a:pPr>
-              <a:spcAft>
-                <a:spcPts val="400"/>
-              </a:spcAft>
-            </a:pPr>
-            <a:r>
-              <a:rPr sz="1100" b="0" i="0">
-                <a:solidFill>
-                  <a:srgbClr val="333333"/>
-                </a:solidFill>
-                <a:latin typeface="Calibri"/>
-              </a:rPr>
-              <a:t/>
-            </a:r>
-          </a:p>
-          <a:p>
-            <a:pPr>
-              <a:spcAft>
-                <a:spcPts val="400"/>
-              </a:spcAft>
-            </a:pPr>
-            <a:r>
-              <a:rPr sz="1200" b="1" i="0">
-                <a:solidFill>
-                  <a:srgbClr val="CC0066"/>
-                </a:solidFill>
-                <a:latin typeface="Calibri"/>
-              </a:rPr>
-              <a:t>Pros:</a:t>
-            </a:r>
-          </a:p>
-          <a:p>
-            <a:pPr>
-              <a:spcAft>
-                <a:spcPts val="400"/>
-              </a:spcAft>
-            </a:pPr>
-            <a:r>
-              <a:rPr sz="1100" b="0" i="0">
-                <a:solidFill>
-                  <a:srgbClr val="333333"/>
-                </a:solidFill>
-                <a:latin typeface="Calibri"/>
-              </a:rPr>
-              <a:t>• Rich metadata, signing</a:t>
-            </a:r>
-          </a:p>
-          <a:p>
-            <a:pPr>
-              <a:spcAft>
-                <a:spcPts val="400"/>
-              </a:spcAft>
-            </a:pPr>
-            <a:r>
-              <a:rPr sz="1100" b="0" i="0">
-                <a:solidFill>
-                  <a:srgbClr val="333333"/>
-                </a:solidFill>
-                <a:latin typeface="Calibri"/>
-              </a:rPr>
-              <a:t>• Default in Poky</a:t>
-            </a:r>
-          </a:p>
-          <a:p>
-            <a:pPr>
-              <a:spcAft>
-                <a:spcPts val="400"/>
-              </a:spcAft>
-            </a:pPr>
-            <a:r>
-              <a:rPr sz="1100" b="0" i="0">
-                <a:solidFill>
-                  <a:srgbClr val="333333"/>
-                </a:solidFill>
-                <a:latin typeface="Calibri"/>
-              </a:rPr>
-              <a:t>• Mature tooling</a:t>
-            </a:r>
-          </a:p>
-          <a:p>
-            <a:pPr>
-              <a:spcAft>
-                <a:spcPts val="400"/>
-              </a:spcAft>
-            </a:pPr>
-            <a:r>
-              <a:rPr sz="1100" b="0" i="0">
-                <a:solidFill>
-                  <a:srgbClr val="333333"/>
-                </a:solidFill>
-                <a:latin typeface="Calibri"/>
-              </a:rPr>
-              <a:t/>
-            </a:r>
-          </a:p>
-          <a:p>
-            <a:pPr>
-              <a:spcAft>
-                <a:spcPts val="400"/>
-              </a:spcAft>
-            </a:pPr>
-            <a:r>
-              <a:rPr sz="1200" b="1" i="0">
-                <a:solidFill>
-                  <a:srgbClr val="CC0066"/>
-                </a:solidFill>
-                <a:latin typeface="Calibri"/>
-              </a:rPr>
-              <a:t>Use when:</a:t>
-            </a:r>
-          </a:p>
-          <a:p>
-            <a:pPr>
-              <a:spcAft>
-                <a:spcPts val="400"/>
-              </a:spcAft>
-            </a:pPr>
-            <a:r>
-              <a:rPr sz="1100" b="0" i="0">
-                <a:solidFill>
-                  <a:srgbClr val="333333"/>
-                </a:solidFill>
-                <a:latin typeface="Calibri"/>
-              </a:rPr>
-              <a:t>Compliance-heavy environments, RPM-based corporate infrastructure</a:t>
-            </a:r>
-          </a:p>
-        </p:txBody>
-      </p:sp>
-      <p:sp>
-        <p:nvSpPr>
-          <p:cNvPr id="13" name="Rounded Rectangle 12"/>
-          <p:cNvSpPr/>
-          <p:nvPr/>
-        </p:nvSpPr>
-        <p:spPr>
-          <a:xfrm>
-            <a:off x="822960" y="6172200"/>
-            <a:ext cx="10515600" cy="365760"/>
-          </a:xfrm>
-          <a:prstGeom prst="roundRect">
-            <a:avLst/>
-          </a:prstGeom>
-          <a:solidFill>
-            <a:srgbClr val="FBE6F0"/>
-          </a:solidFill>
-          <a:ln>
-            <a:noFill/>
-          </a:ln>
-          <a:effectLst/>
-        </p:spPr>
-        <p:style>
-          <a:lnRef idx="1">
-            <a:schemeClr val="accent1"/>
-          </a:lnRef>
-          <a:fillRef idx="3">
-            <a:schemeClr val="accent1"/>
-          </a:fillRef>
-          <a:effectRef idx="2">
-            <a:schemeClr val="accent1"/>
-          </a:effectRef>
-          <a:fontRef idx="minor">
-            <a:schemeClr val="lt1"/>
-          </a:fontRef>
-        </p:style>
-        <p:txBody>
-          <a:bodyPr rtlCol="0" anchor="ctr" lIns="228600" rIns="228600" wrap="square"/>
-          <a:lstStyle/>
-          <a:p>
-            <a:pPr algn="l"/>
-            <a:r>
-              <a:rPr sz="1200" b="1">
-                <a:solidFill>
-                  <a:srgbClr val="663399"/>
-                </a:solidFill>
-                <a:latin typeface="Calibri"/>
-              </a:rPr>
-              <a:t>Set in local.conf:  PACKAGE_CLASSES = "package_ipk"  (or _deb / _rpm). Default is rpm.</a:t>
+              <a:t>BSP and Kernel — Hardware enablement</a:t>
             </a:r>
           </a:p>
         </p:txBody>
